--- a/public/videos/repositories/goal-pilot-app/goal-pilot-app-tech-preview.pptx
+++ b/public/videos/repositories/goal-pilot-app/goal-pilot-app-tech-preview.pptx
@@ -134,7 +134,7 @@
           <p:cNvPr id="2" name="タイトル 1">
             <a:extLst>
               <a:ext uri="{FF2B5EF4-FFF2-40B4-BE49-F238E27FC236}">
-                <a16:creationId xmlns:a16="http://schemas.microsoft.com/office/drawing/2014/main" id="{DD69733B-12DD-44A8-6260-7978E4D8B4EB}"/>
+                <a16:creationId xmlns:a16="http://schemas.microsoft.com/office/drawing/2014/main" id="{3C78FE45-27FC-9934-566E-0B61B26A0D2F}"/>
               </a:ext>
             </a:extLst>
           </p:cNvPr>
@@ -171,7 +171,7 @@
           <p:cNvPr id="3" name="字幕 2">
             <a:extLst>
               <a:ext uri="{FF2B5EF4-FFF2-40B4-BE49-F238E27FC236}">
-                <a16:creationId xmlns:a16="http://schemas.microsoft.com/office/drawing/2014/main" id="{3A22CD2F-4F3E-5C01-BC1D-CD56E40A1C96}"/>
+                <a16:creationId xmlns:a16="http://schemas.microsoft.com/office/drawing/2014/main" id="{59C4FD52-49DA-23B6-E40B-15347FDA5275}"/>
               </a:ext>
             </a:extLst>
           </p:cNvPr>
@@ -241,7 +241,7 @@
           <p:cNvPr id="4" name="日付プレースホルダー 3">
             <a:extLst>
               <a:ext uri="{FF2B5EF4-FFF2-40B4-BE49-F238E27FC236}">
-                <a16:creationId xmlns:a16="http://schemas.microsoft.com/office/drawing/2014/main" id="{14DCE143-B2AA-3596-4435-8D0D65DA6A2C}"/>
+                <a16:creationId xmlns:a16="http://schemas.microsoft.com/office/drawing/2014/main" id="{70DB73F1-7D21-D4AF-1C25-699C15B1C4D6}"/>
               </a:ext>
             </a:extLst>
           </p:cNvPr>
@@ -257,7 +257,7 @@
           <a:bodyPr/>
           <a:lstStyle/>
           <a:p>
-            <a:fld id="{C36CDBCC-E160-43B2-9087-7F26E330CFFF}" type="datetimeFigureOut">
+            <a:fld id="{D03F5CBC-68FC-41D2-8B0A-10598E32BEEB}" type="datetimeFigureOut">
               <a:rPr kumimoji="1" lang="ja-JP" altLang="en-US" smtClean="0"/>
               <a:t>2026/7/30</a:t>
             </a:fld>
@@ -270,7 +270,7 @@
           <p:cNvPr id="5" name="フッター プレースホルダー 4">
             <a:extLst>
               <a:ext uri="{FF2B5EF4-FFF2-40B4-BE49-F238E27FC236}">
-                <a16:creationId xmlns:a16="http://schemas.microsoft.com/office/drawing/2014/main" id="{69787FEE-1145-4F32-5A84-5292F9B603ED}"/>
+                <a16:creationId xmlns:a16="http://schemas.microsoft.com/office/drawing/2014/main" id="{73873359-8AAB-4F05-0C60-E62AF88318C0}"/>
               </a:ext>
             </a:extLst>
           </p:cNvPr>
@@ -295,7 +295,7 @@
           <p:cNvPr id="6" name="スライド番号プレースホルダー 5">
             <a:extLst>
               <a:ext uri="{FF2B5EF4-FFF2-40B4-BE49-F238E27FC236}">
-                <a16:creationId xmlns:a16="http://schemas.microsoft.com/office/drawing/2014/main" id="{808A636B-5851-DCE7-4740-54C206717FB3}"/>
+                <a16:creationId xmlns:a16="http://schemas.microsoft.com/office/drawing/2014/main" id="{71CBE7A7-6E59-7E16-0CE2-DC1796A18A40}"/>
               </a:ext>
             </a:extLst>
           </p:cNvPr>
@@ -311,7 +311,7 @@
           <a:bodyPr/>
           <a:lstStyle/>
           <a:p>
-            <a:fld id="{CC3FA54E-4928-4FFA-9D76-E937EF1755C0}" type="slidenum">
+            <a:fld id="{C2F1D243-1A93-4A8E-B147-14285FFC3BFF}" type="slidenum">
               <a:rPr kumimoji="1" lang="ja-JP" altLang="en-US" smtClean="0"/>
               <a:t>‹#›</a:t>
             </a:fld>
@@ -322,7 +322,7 @@
     </p:spTree>
     <p:extLst>
       <p:ext uri="{BB962C8B-B14F-4D97-AF65-F5344CB8AC3E}">
-        <p14:creationId xmlns:p14="http://schemas.microsoft.com/office/powerpoint/2010/main" val="2520668559"/>
+        <p14:creationId xmlns:p14="http://schemas.microsoft.com/office/powerpoint/2010/main" val="2557854435"/>
       </p:ext>
     </p:extLst>
   </p:cSld>
@@ -354,7 +354,7 @@
           <p:cNvPr id="2" name="タイトル 1">
             <a:extLst>
               <a:ext uri="{FF2B5EF4-FFF2-40B4-BE49-F238E27FC236}">
-                <a16:creationId xmlns:a16="http://schemas.microsoft.com/office/drawing/2014/main" id="{8FEF67EB-BA59-96E7-43F1-C6C7D05B8B9C}"/>
+                <a16:creationId xmlns:a16="http://schemas.microsoft.com/office/drawing/2014/main" id="{D02738F2-D5BA-9EB8-7327-CA94067451BE}"/>
               </a:ext>
             </a:extLst>
           </p:cNvPr>
@@ -382,7 +382,7 @@
           <p:cNvPr id="3" name="縦書きテキスト プレースホルダー 2">
             <a:extLst>
               <a:ext uri="{FF2B5EF4-FFF2-40B4-BE49-F238E27FC236}">
-                <a16:creationId xmlns:a16="http://schemas.microsoft.com/office/drawing/2014/main" id="{9DD58EB4-9BF8-6312-04A3-1DF9B76F6532}"/>
+                <a16:creationId xmlns:a16="http://schemas.microsoft.com/office/drawing/2014/main" id="{CCE87E24-93BF-871C-F30B-C702EC10BB2E}"/>
               </a:ext>
             </a:extLst>
           </p:cNvPr>
@@ -471,7 +471,7 @@
           <p:cNvPr id="4" name="日付プレースホルダー 3">
             <a:extLst>
               <a:ext uri="{FF2B5EF4-FFF2-40B4-BE49-F238E27FC236}">
-                <a16:creationId xmlns:a16="http://schemas.microsoft.com/office/drawing/2014/main" id="{E375754A-5D13-B7A1-DA83-332B3DCFCA20}"/>
+                <a16:creationId xmlns:a16="http://schemas.microsoft.com/office/drawing/2014/main" id="{9D06AA51-8864-F02F-7151-1B60E70618ED}"/>
               </a:ext>
             </a:extLst>
           </p:cNvPr>
@@ -487,7 +487,7 @@
           <a:bodyPr/>
           <a:lstStyle/>
           <a:p>
-            <a:fld id="{C36CDBCC-E160-43B2-9087-7F26E330CFFF}" type="datetimeFigureOut">
+            <a:fld id="{D03F5CBC-68FC-41D2-8B0A-10598E32BEEB}" type="datetimeFigureOut">
               <a:rPr kumimoji="1" lang="ja-JP" altLang="en-US" smtClean="0"/>
               <a:t>2026/7/30</a:t>
             </a:fld>
@@ -500,7 +500,7 @@
           <p:cNvPr id="5" name="フッター プレースホルダー 4">
             <a:extLst>
               <a:ext uri="{FF2B5EF4-FFF2-40B4-BE49-F238E27FC236}">
-                <a16:creationId xmlns:a16="http://schemas.microsoft.com/office/drawing/2014/main" id="{0C7BEFF4-8B37-DAE6-EF88-C686401AFE89}"/>
+                <a16:creationId xmlns:a16="http://schemas.microsoft.com/office/drawing/2014/main" id="{C1EEBCB5-FB8E-2CE9-4F70-D26200F5571A}"/>
               </a:ext>
             </a:extLst>
           </p:cNvPr>
@@ -525,7 +525,7 @@
           <p:cNvPr id="6" name="スライド番号プレースホルダー 5">
             <a:extLst>
               <a:ext uri="{FF2B5EF4-FFF2-40B4-BE49-F238E27FC236}">
-                <a16:creationId xmlns:a16="http://schemas.microsoft.com/office/drawing/2014/main" id="{402A8794-5FE3-9624-9C9C-27194932B304}"/>
+                <a16:creationId xmlns:a16="http://schemas.microsoft.com/office/drawing/2014/main" id="{8D6F4067-B8E4-BAA2-8C8A-9E59FAE60988}"/>
               </a:ext>
             </a:extLst>
           </p:cNvPr>
@@ -541,7 +541,7 @@
           <a:bodyPr/>
           <a:lstStyle/>
           <a:p>
-            <a:fld id="{CC3FA54E-4928-4FFA-9D76-E937EF1755C0}" type="slidenum">
+            <a:fld id="{C2F1D243-1A93-4A8E-B147-14285FFC3BFF}" type="slidenum">
               <a:rPr kumimoji="1" lang="ja-JP" altLang="en-US" smtClean="0"/>
               <a:t>‹#›</a:t>
             </a:fld>
@@ -552,7 +552,7 @@
     </p:spTree>
     <p:extLst>
       <p:ext uri="{BB962C8B-B14F-4D97-AF65-F5344CB8AC3E}">
-        <p14:creationId xmlns:p14="http://schemas.microsoft.com/office/powerpoint/2010/main" val="57293688"/>
+        <p14:creationId xmlns:p14="http://schemas.microsoft.com/office/powerpoint/2010/main" val="3948252111"/>
       </p:ext>
     </p:extLst>
   </p:cSld>
@@ -584,7 +584,7 @@
           <p:cNvPr id="2" name="縦書きタイトル 1">
             <a:extLst>
               <a:ext uri="{FF2B5EF4-FFF2-40B4-BE49-F238E27FC236}">
-                <a16:creationId xmlns:a16="http://schemas.microsoft.com/office/drawing/2014/main" id="{AEC646E6-55EB-5438-C9B3-D300D2CD72C1}"/>
+                <a16:creationId xmlns:a16="http://schemas.microsoft.com/office/drawing/2014/main" id="{59B5735E-C11F-99A1-7997-AE7ACE9A9DFC}"/>
               </a:ext>
             </a:extLst>
           </p:cNvPr>
@@ -617,7 +617,7 @@
           <p:cNvPr id="3" name="縦書きテキスト プレースホルダー 2">
             <a:extLst>
               <a:ext uri="{FF2B5EF4-FFF2-40B4-BE49-F238E27FC236}">
-                <a16:creationId xmlns:a16="http://schemas.microsoft.com/office/drawing/2014/main" id="{B551CAC1-DA47-D186-7EF6-5F11C96E72BA}"/>
+                <a16:creationId xmlns:a16="http://schemas.microsoft.com/office/drawing/2014/main" id="{0B01CA80-38FB-8E8A-FFB7-AF50EF7CC50B}"/>
               </a:ext>
             </a:extLst>
           </p:cNvPr>
@@ -711,7 +711,7 @@
           <p:cNvPr id="4" name="日付プレースホルダー 3">
             <a:extLst>
               <a:ext uri="{FF2B5EF4-FFF2-40B4-BE49-F238E27FC236}">
-                <a16:creationId xmlns:a16="http://schemas.microsoft.com/office/drawing/2014/main" id="{1E8A258D-9BE6-344E-D55E-C2BB62E5FC77}"/>
+                <a16:creationId xmlns:a16="http://schemas.microsoft.com/office/drawing/2014/main" id="{98859382-8A95-C80B-638E-6166D35E78AB}"/>
               </a:ext>
             </a:extLst>
           </p:cNvPr>
@@ -727,7 +727,7 @@
           <a:bodyPr/>
           <a:lstStyle/>
           <a:p>
-            <a:fld id="{C36CDBCC-E160-43B2-9087-7F26E330CFFF}" type="datetimeFigureOut">
+            <a:fld id="{D03F5CBC-68FC-41D2-8B0A-10598E32BEEB}" type="datetimeFigureOut">
               <a:rPr kumimoji="1" lang="ja-JP" altLang="en-US" smtClean="0"/>
               <a:t>2026/7/30</a:t>
             </a:fld>
@@ -740,7 +740,7 @@
           <p:cNvPr id="5" name="フッター プレースホルダー 4">
             <a:extLst>
               <a:ext uri="{FF2B5EF4-FFF2-40B4-BE49-F238E27FC236}">
-                <a16:creationId xmlns:a16="http://schemas.microsoft.com/office/drawing/2014/main" id="{C352150B-5BE7-EC70-16AF-009019A27FB7}"/>
+                <a16:creationId xmlns:a16="http://schemas.microsoft.com/office/drawing/2014/main" id="{3448E2AC-6630-8182-3877-CF612A71BB1E}"/>
               </a:ext>
             </a:extLst>
           </p:cNvPr>
@@ -765,7 +765,7 @@
           <p:cNvPr id="6" name="スライド番号プレースホルダー 5">
             <a:extLst>
               <a:ext uri="{FF2B5EF4-FFF2-40B4-BE49-F238E27FC236}">
-                <a16:creationId xmlns:a16="http://schemas.microsoft.com/office/drawing/2014/main" id="{7F2104A0-8951-B24E-6DB1-39E68DE1508D}"/>
+                <a16:creationId xmlns:a16="http://schemas.microsoft.com/office/drawing/2014/main" id="{51FAB372-5C8F-053C-B100-BFAFE6BC1E2A}"/>
               </a:ext>
             </a:extLst>
           </p:cNvPr>
@@ -781,7 +781,7 @@
           <a:bodyPr/>
           <a:lstStyle/>
           <a:p>
-            <a:fld id="{CC3FA54E-4928-4FFA-9D76-E937EF1755C0}" type="slidenum">
+            <a:fld id="{C2F1D243-1A93-4A8E-B147-14285FFC3BFF}" type="slidenum">
               <a:rPr kumimoji="1" lang="ja-JP" altLang="en-US" smtClean="0"/>
               <a:t>‹#›</a:t>
             </a:fld>
@@ -792,7 +792,7 @@
     </p:spTree>
     <p:extLst>
       <p:ext uri="{BB962C8B-B14F-4D97-AF65-F5344CB8AC3E}">
-        <p14:creationId xmlns:p14="http://schemas.microsoft.com/office/powerpoint/2010/main" val="2929263747"/>
+        <p14:creationId xmlns:p14="http://schemas.microsoft.com/office/powerpoint/2010/main" val="4040345162"/>
       </p:ext>
     </p:extLst>
   </p:cSld>
@@ -824,7 +824,7 @@
           <p:cNvPr id="2" name="タイトル 1">
             <a:extLst>
               <a:ext uri="{FF2B5EF4-FFF2-40B4-BE49-F238E27FC236}">
-                <a16:creationId xmlns:a16="http://schemas.microsoft.com/office/drawing/2014/main" id="{4FF61698-108D-D587-8889-1A7E3ECCC683}"/>
+                <a16:creationId xmlns:a16="http://schemas.microsoft.com/office/drawing/2014/main" id="{CFF499CC-9D03-45F3-4141-BB7D6DDAB7FE}"/>
               </a:ext>
             </a:extLst>
           </p:cNvPr>
@@ -852,7 +852,7 @@
           <p:cNvPr id="3" name="コンテンツ プレースホルダー 2">
             <a:extLst>
               <a:ext uri="{FF2B5EF4-FFF2-40B4-BE49-F238E27FC236}">
-                <a16:creationId xmlns:a16="http://schemas.microsoft.com/office/drawing/2014/main" id="{0E8832AC-DB80-B608-6BB0-3BBCC0F2EBD6}"/>
+                <a16:creationId xmlns:a16="http://schemas.microsoft.com/office/drawing/2014/main" id="{E3D75EFC-DBCA-2CCB-F751-1E91F5043CAE}"/>
               </a:ext>
             </a:extLst>
           </p:cNvPr>
@@ -941,7 +941,7 @@
           <p:cNvPr id="4" name="日付プレースホルダー 3">
             <a:extLst>
               <a:ext uri="{FF2B5EF4-FFF2-40B4-BE49-F238E27FC236}">
-                <a16:creationId xmlns:a16="http://schemas.microsoft.com/office/drawing/2014/main" id="{BAC859E1-A8AD-A4CF-DFDF-0D9D4B8B7F3C}"/>
+                <a16:creationId xmlns:a16="http://schemas.microsoft.com/office/drawing/2014/main" id="{F445F7E9-DB88-6FC2-37D7-37AC4905445A}"/>
               </a:ext>
             </a:extLst>
           </p:cNvPr>
@@ -957,7 +957,7 @@
           <a:bodyPr/>
           <a:lstStyle/>
           <a:p>
-            <a:fld id="{C36CDBCC-E160-43B2-9087-7F26E330CFFF}" type="datetimeFigureOut">
+            <a:fld id="{D03F5CBC-68FC-41D2-8B0A-10598E32BEEB}" type="datetimeFigureOut">
               <a:rPr kumimoji="1" lang="ja-JP" altLang="en-US" smtClean="0"/>
               <a:t>2026/7/30</a:t>
             </a:fld>
@@ -970,7 +970,7 @@
           <p:cNvPr id="5" name="フッター プレースホルダー 4">
             <a:extLst>
               <a:ext uri="{FF2B5EF4-FFF2-40B4-BE49-F238E27FC236}">
-                <a16:creationId xmlns:a16="http://schemas.microsoft.com/office/drawing/2014/main" id="{DB5B1AD9-A684-EC89-EB8D-A15043863323}"/>
+                <a16:creationId xmlns:a16="http://schemas.microsoft.com/office/drawing/2014/main" id="{013DE1A8-8012-D01F-88A2-7925753414C6}"/>
               </a:ext>
             </a:extLst>
           </p:cNvPr>
@@ -995,7 +995,7 @@
           <p:cNvPr id="6" name="スライド番号プレースホルダー 5">
             <a:extLst>
               <a:ext uri="{FF2B5EF4-FFF2-40B4-BE49-F238E27FC236}">
-                <a16:creationId xmlns:a16="http://schemas.microsoft.com/office/drawing/2014/main" id="{C1CAE7A2-0B76-3AD0-3107-A7A6493AA2B5}"/>
+                <a16:creationId xmlns:a16="http://schemas.microsoft.com/office/drawing/2014/main" id="{76B13CCF-DF4D-8CC3-215A-60A8B9717A92}"/>
               </a:ext>
             </a:extLst>
           </p:cNvPr>
@@ -1011,7 +1011,7 @@
           <a:bodyPr/>
           <a:lstStyle/>
           <a:p>
-            <a:fld id="{CC3FA54E-4928-4FFA-9D76-E937EF1755C0}" type="slidenum">
+            <a:fld id="{C2F1D243-1A93-4A8E-B147-14285FFC3BFF}" type="slidenum">
               <a:rPr kumimoji="1" lang="ja-JP" altLang="en-US" smtClean="0"/>
               <a:t>‹#›</a:t>
             </a:fld>
@@ -1022,7 +1022,7 @@
     </p:spTree>
     <p:extLst>
       <p:ext uri="{BB962C8B-B14F-4D97-AF65-F5344CB8AC3E}">
-        <p14:creationId xmlns:p14="http://schemas.microsoft.com/office/powerpoint/2010/main" val="1718037265"/>
+        <p14:creationId xmlns:p14="http://schemas.microsoft.com/office/powerpoint/2010/main" val="6145751"/>
       </p:ext>
     </p:extLst>
   </p:cSld>
@@ -1054,7 +1054,7 @@
           <p:cNvPr id="2" name="タイトル 1">
             <a:extLst>
               <a:ext uri="{FF2B5EF4-FFF2-40B4-BE49-F238E27FC236}">
-                <a16:creationId xmlns:a16="http://schemas.microsoft.com/office/drawing/2014/main" id="{B6DF7B12-5939-E70F-E552-3A0BD94ACC95}"/>
+                <a16:creationId xmlns:a16="http://schemas.microsoft.com/office/drawing/2014/main" id="{7EBCC479-4AF0-4338-804E-B8114EA1206F}"/>
               </a:ext>
             </a:extLst>
           </p:cNvPr>
@@ -1091,7 +1091,7 @@
           <p:cNvPr id="3" name="テキスト プレースホルダー 2">
             <a:extLst>
               <a:ext uri="{FF2B5EF4-FFF2-40B4-BE49-F238E27FC236}">
-                <a16:creationId xmlns:a16="http://schemas.microsoft.com/office/drawing/2014/main" id="{804E85BA-3C56-D244-27BB-FC31263CCD37}"/>
+                <a16:creationId xmlns:a16="http://schemas.microsoft.com/office/drawing/2014/main" id="{6CB1AD3A-D203-DE29-BBEE-5D284C99F8C5}"/>
               </a:ext>
             </a:extLst>
           </p:cNvPr>
@@ -1216,7 +1216,7 @@
           <p:cNvPr id="4" name="日付プレースホルダー 3">
             <a:extLst>
               <a:ext uri="{FF2B5EF4-FFF2-40B4-BE49-F238E27FC236}">
-                <a16:creationId xmlns:a16="http://schemas.microsoft.com/office/drawing/2014/main" id="{BE6710CC-0CC6-7A22-5D7E-1C0D840635CE}"/>
+                <a16:creationId xmlns:a16="http://schemas.microsoft.com/office/drawing/2014/main" id="{43C51C9C-DA32-CFDC-2C31-952FFA93B712}"/>
               </a:ext>
             </a:extLst>
           </p:cNvPr>
@@ -1232,7 +1232,7 @@
           <a:bodyPr/>
           <a:lstStyle/>
           <a:p>
-            <a:fld id="{C36CDBCC-E160-43B2-9087-7F26E330CFFF}" type="datetimeFigureOut">
+            <a:fld id="{D03F5CBC-68FC-41D2-8B0A-10598E32BEEB}" type="datetimeFigureOut">
               <a:rPr kumimoji="1" lang="ja-JP" altLang="en-US" smtClean="0"/>
               <a:t>2026/7/30</a:t>
             </a:fld>
@@ -1245,7 +1245,7 @@
           <p:cNvPr id="5" name="フッター プレースホルダー 4">
             <a:extLst>
               <a:ext uri="{FF2B5EF4-FFF2-40B4-BE49-F238E27FC236}">
-                <a16:creationId xmlns:a16="http://schemas.microsoft.com/office/drawing/2014/main" id="{FFFE83AA-837B-1BC3-5B39-7D7795A1B76F}"/>
+                <a16:creationId xmlns:a16="http://schemas.microsoft.com/office/drawing/2014/main" id="{C905E55A-6213-1721-5B0E-41C24BCDB93B}"/>
               </a:ext>
             </a:extLst>
           </p:cNvPr>
@@ -1270,7 +1270,7 @@
           <p:cNvPr id="6" name="スライド番号プレースホルダー 5">
             <a:extLst>
               <a:ext uri="{FF2B5EF4-FFF2-40B4-BE49-F238E27FC236}">
-                <a16:creationId xmlns:a16="http://schemas.microsoft.com/office/drawing/2014/main" id="{08692CF8-8693-270A-3B6B-DE4A9608EA8E}"/>
+                <a16:creationId xmlns:a16="http://schemas.microsoft.com/office/drawing/2014/main" id="{40E639B6-59A5-74DD-A53B-FDBA40C22C9D}"/>
               </a:ext>
             </a:extLst>
           </p:cNvPr>
@@ -1286,7 +1286,7 @@
           <a:bodyPr/>
           <a:lstStyle/>
           <a:p>
-            <a:fld id="{CC3FA54E-4928-4FFA-9D76-E937EF1755C0}" type="slidenum">
+            <a:fld id="{C2F1D243-1A93-4A8E-B147-14285FFC3BFF}" type="slidenum">
               <a:rPr kumimoji="1" lang="ja-JP" altLang="en-US" smtClean="0"/>
               <a:t>‹#›</a:t>
             </a:fld>
@@ -1297,7 +1297,7 @@
     </p:spTree>
     <p:extLst>
       <p:ext uri="{BB962C8B-B14F-4D97-AF65-F5344CB8AC3E}">
-        <p14:creationId xmlns:p14="http://schemas.microsoft.com/office/powerpoint/2010/main" val="302365812"/>
+        <p14:creationId xmlns:p14="http://schemas.microsoft.com/office/powerpoint/2010/main" val="719895994"/>
       </p:ext>
     </p:extLst>
   </p:cSld>
@@ -1329,7 +1329,7 @@
           <p:cNvPr id="2" name="タイトル 1">
             <a:extLst>
               <a:ext uri="{FF2B5EF4-FFF2-40B4-BE49-F238E27FC236}">
-                <a16:creationId xmlns:a16="http://schemas.microsoft.com/office/drawing/2014/main" id="{DBBEE7AB-D681-968B-7F93-C3314F421F10}"/>
+                <a16:creationId xmlns:a16="http://schemas.microsoft.com/office/drawing/2014/main" id="{E022211D-A569-9FF0-BA3E-6BBACD8BF670}"/>
               </a:ext>
             </a:extLst>
           </p:cNvPr>
@@ -1357,7 +1357,7 @@
           <p:cNvPr id="3" name="コンテンツ プレースホルダー 2">
             <a:extLst>
               <a:ext uri="{FF2B5EF4-FFF2-40B4-BE49-F238E27FC236}">
-                <a16:creationId xmlns:a16="http://schemas.microsoft.com/office/drawing/2014/main" id="{2628BFE9-ED5C-771B-97FB-D86EDABE657C}"/>
+                <a16:creationId xmlns:a16="http://schemas.microsoft.com/office/drawing/2014/main" id="{433BEA35-BB79-1B35-2CC0-2BADF4A5FEAC}"/>
               </a:ext>
             </a:extLst>
           </p:cNvPr>
@@ -1451,7 +1451,7 @@
           <p:cNvPr id="4" name="コンテンツ プレースホルダー 3">
             <a:extLst>
               <a:ext uri="{FF2B5EF4-FFF2-40B4-BE49-F238E27FC236}">
-                <a16:creationId xmlns:a16="http://schemas.microsoft.com/office/drawing/2014/main" id="{B2EE194E-2F0C-B622-6161-0784F507CDA3}"/>
+                <a16:creationId xmlns:a16="http://schemas.microsoft.com/office/drawing/2014/main" id="{29C812F5-A00B-1940-6BDB-1CD9468972BE}"/>
               </a:ext>
             </a:extLst>
           </p:cNvPr>
@@ -1545,7 +1545,7 @@
           <p:cNvPr id="5" name="日付プレースホルダー 4">
             <a:extLst>
               <a:ext uri="{FF2B5EF4-FFF2-40B4-BE49-F238E27FC236}">
-                <a16:creationId xmlns:a16="http://schemas.microsoft.com/office/drawing/2014/main" id="{684CC507-6378-C2F9-86B7-098CC444CDEE}"/>
+                <a16:creationId xmlns:a16="http://schemas.microsoft.com/office/drawing/2014/main" id="{C7BA2C04-4E3F-7BF5-0B6D-F4FE00BCDDD7}"/>
               </a:ext>
             </a:extLst>
           </p:cNvPr>
@@ -1561,7 +1561,7 @@
           <a:bodyPr/>
           <a:lstStyle/>
           <a:p>
-            <a:fld id="{C36CDBCC-E160-43B2-9087-7F26E330CFFF}" type="datetimeFigureOut">
+            <a:fld id="{D03F5CBC-68FC-41D2-8B0A-10598E32BEEB}" type="datetimeFigureOut">
               <a:rPr kumimoji="1" lang="ja-JP" altLang="en-US" smtClean="0"/>
               <a:t>2026/7/30</a:t>
             </a:fld>
@@ -1574,7 +1574,7 @@
           <p:cNvPr id="6" name="フッター プレースホルダー 5">
             <a:extLst>
               <a:ext uri="{FF2B5EF4-FFF2-40B4-BE49-F238E27FC236}">
-                <a16:creationId xmlns:a16="http://schemas.microsoft.com/office/drawing/2014/main" id="{B75A40DF-A6DE-BBE0-8B21-053C925DC9AF}"/>
+                <a16:creationId xmlns:a16="http://schemas.microsoft.com/office/drawing/2014/main" id="{127D6E20-FF87-2C22-6C5F-EBBECE7D776A}"/>
               </a:ext>
             </a:extLst>
           </p:cNvPr>
@@ -1599,7 +1599,7 @@
           <p:cNvPr id="7" name="スライド番号プレースホルダー 6">
             <a:extLst>
               <a:ext uri="{FF2B5EF4-FFF2-40B4-BE49-F238E27FC236}">
-                <a16:creationId xmlns:a16="http://schemas.microsoft.com/office/drawing/2014/main" id="{3C5C5B73-D113-2A38-885B-5ED0C6041203}"/>
+                <a16:creationId xmlns:a16="http://schemas.microsoft.com/office/drawing/2014/main" id="{0F01074E-1767-2694-E43D-E9CA97CEA130}"/>
               </a:ext>
             </a:extLst>
           </p:cNvPr>
@@ -1615,7 +1615,7 @@
           <a:bodyPr/>
           <a:lstStyle/>
           <a:p>
-            <a:fld id="{CC3FA54E-4928-4FFA-9D76-E937EF1755C0}" type="slidenum">
+            <a:fld id="{C2F1D243-1A93-4A8E-B147-14285FFC3BFF}" type="slidenum">
               <a:rPr kumimoji="1" lang="ja-JP" altLang="en-US" smtClean="0"/>
               <a:t>‹#›</a:t>
             </a:fld>
@@ -1626,7 +1626,7 @@
     </p:spTree>
     <p:extLst>
       <p:ext uri="{BB962C8B-B14F-4D97-AF65-F5344CB8AC3E}">
-        <p14:creationId xmlns:p14="http://schemas.microsoft.com/office/powerpoint/2010/main" val="1466764430"/>
+        <p14:creationId xmlns:p14="http://schemas.microsoft.com/office/powerpoint/2010/main" val="3966275712"/>
       </p:ext>
     </p:extLst>
   </p:cSld>
@@ -1658,7 +1658,7 @@
           <p:cNvPr id="2" name="タイトル 1">
             <a:extLst>
               <a:ext uri="{FF2B5EF4-FFF2-40B4-BE49-F238E27FC236}">
-                <a16:creationId xmlns:a16="http://schemas.microsoft.com/office/drawing/2014/main" id="{415EA8CE-A8EA-9747-F40E-0ECD37C7F3DD}"/>
+                <a16:creationId xmlns:a16="http://schemas.microsoft.com/office/drawing/2014/main" id="{408E77E9-24BF-3C04-AD03-79848018E1F8}"/>
               </a:ext>
             </a:extLst>
           </p:cNvPr>
@@ -1691,7 +1691,7 @@
           <p:cNvPr id="3" name="テキスト プレースホルダー 2">
             <a:extLst>
               <a:ext uri="{FF2B5EF4-FFF2-40B4-BE49-F238E27FC236}">
-                <a16:creationId xmlns:a16="http://schemas.microsoft.com/office/drawing/2014/main" id="{EA2715EB-AFCA-1554-0603-31C16BC1CB9C}"/>
+                <a16:creationId xmlns:a16="http://schemas.microsoft.com/office/drawing/2014/main" id="{E2A2ECAF-5A31-B2AC-87AA-F458945A92C8}"/>
               </a:ext>
             </a:extLst>
           </p:cNvPr>
@@ -1762,7 +1762,7 @@
           <p:cNvPr id="4" name="コンテンツ プレースホルダー 3">
             <a:extLst>
               <a:ext uri="{FF2B5EF4-FFF2-40B4-BE49-F238E27FC236}">
-                <a16:creationId xmlns:a16="http://schemas.microsoft.com/office/drawing/2014/main" id="{CAED58A8-95C8-198C-DE94-2DED16C74568}"/>
+                <a16:creationId xmlns:a16="http://schemas.microsoft.com/office/drawing/2014/main" id="{9D7E98DA-E020-36D7-5923-5343A9C5B9DA}"/>
               </a:ext>
             </a:extLst>
           </p:cNvPr>
@@ -1856,7 +1856,7 @@
           <p:cNvPr id="5" name="テキスト プレースホルダー 4">
             <a:extLst>
               <a:ext uri="{FF2B5EF4-FFF2-40B4-BE49-F238E27FC236}">
-                <a16:creationId xmlns:a16="http://schemas.microsoft.com/office/drawing/2014/main" id="{ED087F8D-136F-94BF-8032-5319BAD744C7}"/>
+                <a16:creationId xmlns:a16="http://schemas.microsoft.com/office/drawing/2014/main" id="{8B84F2C6-444A-ABE6-BDE9-F4794994F66D}"/>
               </a:ext>
             </a:extLst>
           </p:cNvPr>
@@ -1927,7 +1927,7 @@
           <p:cNvPr id="6" name="コンテンツ プレースホルダー 5">
             <a:extLst>
               <a:ext uri="{FF2B5EF4-FFF2-40B4-BE49-F238E27FC236}">
-                <a16:creationId xmlns:a16="http://schemas.microsoft.com/office/drawing/2014/main" id="{DEA7B2EB-913D-1733-3D03-74E7FB6B0EA5}"/>
+                <a16:creationId xmlns:a16="http://schemas.microsoft.com/office/drawing/2014/main" id="{C20C9EEC-5E74-089E-A302-6EB6BADB4A10}"/>
               </a:ext>
             </a:extLst>
           </p:cNvPr>
@@ -2021,7 +2021,7 @@
           <p:cNvPr id="7" name="日付プレースホルダー 6">
             <a:extLst>
               <a:ext uri="{FF2B5EF4-FFF2-40B4-BE49-F238E27FC236}">
-                <a16:creationId xmlns:a16="http://schemas.microsoft.com/office/drawing/2014/main" id="{E99D3A5B-A8E1-29DA-A852-CCE1E94CDD1B}"/>
+                <a16:creationId xmlns:a16="http://schemas.microsoft.com/office/drawing/2014/main" id="{72268F9B-E1FE-B7C4-4DB6-3E978210C274}"/>
               </a:ext>
             </a:extLst>
           </p:cNvPr>
@@ -2037,7 +2037,7 @@
           <a:bodyPr/>
           <a:lstStyle/>
           <a:p>
-            <a:fld id="{C36CDBCC-E160-43B2-9087-7F26E330CFFF}" type="datetimeFigureOut">
+            <a:fld id="{D03F5CBC-68FC-41D2-8B0A-10598E32BEEB}" type="datetimeFigureOut">
               <a:rPr kumimoji="1" lang="ja-JP" altLang="en-US" smtClean="0"/>
               <a:t>2026/7/30</a:t>
             </a:fld>
@@ -2050,7 +2050,7 @@
           <p:cNvPr id="8" name="フッター プレースホルダー 7">
             <a:extLst>
               <a:ext uri="{FF2B5EF4-FFF2-40B4-BE49-F238E27FC236}">
-                <a16:creationId xmlns:a16="http://schemas.microsoft.com/office/drawing/2014/main" id="{FC5F3D6E-2FBA-084D-9C07-BBCF049DFCA7}"/>
+                <a16:creationId xmlns:a16="http://schemas.microsoft.com/office/drawing/2014/main" id="{B5B5A1B6-A391-081B-8D5B-64B14BB63B25}"/>
               </a:ext>
             </a:extLst>
           </p:cNvPr>
@@ -2075,7 +2075,7 @@
           <p:cNvPr id="9" name="スライド番号プレースホルダー 8">
             <a:extLst>
               <a:ext uri="{FF2B5EF4-FFF2-40B4-BE49-F238E27FC236}">
-                <a16:creationId xmlns:a16="http://schemas.microsoft.com/office/drawing/2014/main" id="{D7234BA7-1E40-FB75-4E41-AF6333F048CC}"/>
+                <a16:creationId xmlns:a16="http://schemas.microsoft.com/office/drawing/2014/main" id="{BE743B28-4BE9-4D14-29F0-6537F1925FAA}"/>
               </a:ext>
             </a:extLst>
           </p:cNvPr>
@@ -2091,7 +2091,7 @@
           <a:bodyPr/>
           <a:lstStyle/>
           <a:p>
-            <a:fld id="{CC3FA54E-4928-4FFA-9D76-E937EF1755C0}" type="slidenum">
+            <a:fld id="{C2F1D243-1A93-4A8E-B147-14285FFC3BFF}" type="slidenum">
               <a:rPr kumimoji="1" lang="ja-JP" altLang="en-US" smtClean="0"/>
               <a:t>‹#›</a:t>
             </a:fld>
@@ -2102,7 +2102,7 @@
     </p:spTree>
     <p:extLst>
       <p:ext uri="{BB962C8B-B14F-4D97-AF65-F5344CB8AC3E}">
-        <p14:creationId xmlns:p14="http://schemas.microsoft.com/office/powerpoint/2010/main" val="2350514402"/>
+        <p14:creationId xmlns:p14="http://schemas.microsoft.com/office/powerpoint/2010/main" val="3159746880"/>
       </p:ext>
     </p:extLst>
   </p:cSld>
@@ -2134,7 +2134,7 @@
           <p:cNvPr id="2" name="タイトル 1">
             <a:extLst>
               <a:ext uri="{FF2B5EF4-FFF2-40B4-BE49-F238E27FC236}">
-                <a16:creationId xmlns:a16="http://schemas.microsoft.com/office/drawing/2014/main" id="{A2D7CA61-0A13-D0AA-C7DB-F33D83FD803B}"/>
+                <a16:creationId xmlns:a16="http://schemas.microsoft.com/office/drawing/2014/main" id="{83F4539B-B25B-E699-DA49-4199B9A6F5FC}"/>
               </a:ext>
             </a:extLst>
           </p:cNvPr>
@@ -2162,7 +2162,7 @@
           <p:cNvPr id="3" name="日付プレースホルダー 2">
             <a:extLst>
               <a:ext uri="{FF2B5EF4-FFF2-40B4-BE49-F238E27FC236}">
-                <a16:creationId xmlns:a16="http://schemas.microsoft.com/office/drawing/2014/main" id="{3206AF26-0F6E-FCED-1388-645B7452AF6C}"/>
+                <a16:creationId xmlns:a16="http://schemas.microsoft.com/office/drawing/2014/main" id="{9F71D639-38A8-4E13-E2E7-B7E780EE80CA}"/>
               </a:ext>
             </a:extLst>
           </p:cNvPr>
@@ -2178,7 +2178,7 @@
           <a:bodyPr/>
           <a:lstStyle/>
           <a:p>
-            <a:fld id="{C36CDBCC-E160-43B2-9087-7F26E330CFFF}" type="datetimeFigureOut">
+            <a:fld id="{D03F5CBC-68FC-41D2-8B0A-10598E32BEEB}" type="datetimeFigureOut">
               <a:rPr kumimoji="1" lang="ja-JP" altLang="en-US" smtClean="0"/>
               <a:t>2026/7/30</a:t>
             </a:fld>
@@ -2191,7 +2191,7 @@
           <p:cNvPr id="4" name="フッター プレースホルダー 3">
             <a:extLst>
               <a:ext uri="{FF2B5EF4-FFF2-40B4-BE49-F238E27FC236}">
-                <a16:creationId xmlns:a16="http://schemas.microsoft.com/office/drawing/2014/main" id="{A9A58751-813F-2BDB-55DE-20D8BFC329A5}"/>
+                <a16:creationId xmlns:a16="http://schemas.microsoft.com/office/drawing/2014/main" id="{074ABF21-8216-8468-F462-09E4E5110E56}"/>
               </a:ext>
             </a:extLst>
           </p:cNvPr>
@@ -2216,7 +2216,7 @@
           <p:cNvPr id="5" name="スライド番号プレースホルダー 4">
             <a:extLst>
               <a:ext uri="{FF2B5EF4-FFF2-40B4-BE49-F238E27FC236}">
-                <a16:creationId xmlns:a16="http://schemas.microsoft.com/office/drawing/2014/main" id="{EBFFBA81-A55B-6BA9-F2A2-111FE0C48550}"/>
+                <a16:creationId xmlns:a16="http://schemas.microsoft.com/office/drawing/2014/main" id="{A8C41F66-6DEC-DFC1-B86A-107CA8AB3403}"/>
               </a:ext>
             </a:extLst>
           </p:cNvPr>
@@ -2232,7 +2232,7 @@
           <a:bodyPr/>
           <a:lstStyle/>
           <a:p>
-            <a:fld id="{CC3FA54E-4928-4FFA-9D76-E937EF1755C0}" type="slidenum">
+            <a:fld id="{C2F1D243-1A93-4A8E-B147-14285FFC3BFF}" type="slidenum">
               <a:rPr kumimoji="1" lang="ja-JP" altLang="en-US" smtClean="0"/>
               <a:t>‹#›</a:t>
             </a:fld>
@@ -2243,7 +2243,7 @@
     </p:spTree>
     <p:extLst>
       <p:ext uri="{BB962C8B-B14F-4D97-AF65-F5344CB8AC3E}">
-        <p14:creationId xmlns:p14="http://schemas.microsoft.com/office/powerpoint/2010/main" val="3109092227"/>
+        <p14:creationId xmlns:p14="http://schemas.microsoft.com/office/powerpoint/2010/main" val="367833363"/>
       </p:ext>
     </p:extLst>
   </p:cSld>
@@ -2275,7 +2275,7 @@
           <p:cNvPr id="2" name="日付プレースホルダー 1">
             <a:extLst>
               <a:ext uri="{FF2B5EF4-FFF2-40B4-BE49-F238E27FC236}">
-                <a16:creationId xmlns:a16="http://schemas.microsoft.com/office/drawing/2014/main" id="{3D3EC1F5-F59A-2EF6-273B-06AE4084FDE4}"/>
+                <a16:creationId xmlns:a16="http://schemas.microsoft.com/office/drawing/2014/main" id="{28877416-58A7-E8EF-9282-8D079FB74444}"/>
               </a:ext>
             </a:extLst>
           </p:cNvPr>
@@ -2291,7 +2291,7 @@
           <a:bodyPr/>
           <a:lstStyle/>
           <a:p>
-            <a:fld id="{C36CDBCC-E160-43B2-9087-7F26E330CFFF}" type="datetimeFigureOut">
+            <a:fld id="{D03F5CBC-68FC-41D2-8B0A-10598E32BEEB}" type="datetimeFigureOut">
               <a:rPr kumimoji="1" lang="ja-JP" altLang="en-US" smtClean="0"/>
               <a:t>2026/7/30</a:t>
             </a:fld>
@@ -2304,7 +2304,7 @@
           <p:cNvPr id="3" name="フッター プレースホルダー 2">
             <a:extLst>
               <a:ext uri="{FF2B5EF4-FFF2-40B4-BE49-F238E27FC236}">
-                <a16:creationId xmlns:a16="http://schemas.microsoft.com/office/drawing/2014/main" id="{1D7988A6-64DC-8E1D-84B7-39011E9CAB67}"/>
+                <a16:creationId xmlns:a16="http://schemas.microsoft.com/office/drawing/2014/main" id="{B172922F-5207-582B-CF55-940CB823B20A}"/>
               </a:ext>
             </a:extLst>
           </p:cNvPr>
@@ -2329,7 +2329,7 @@
           <p:cNvPr id="4" name="スライド番号プレースホルダー 3">
             <a:extLst>
               <a:ext uri="{FF2B5EF4-FFF2-40B4-BE49-F238E27FC236}">
-                <a16:creationId xmlns:a16="http://schemas.microsoft.com/office/drawing/2014/main" id="{9D2C75E7-DFE8-89AF-9EB6-8E946A0BAF05}"/>
+                <a16:creationId xmlns:a16="http://schemas.microsoft.com/office/drawing/2014/main" id="{4FD3DD98-4068-EA29-0A70-75FDD0E06B3D}"/>
               </a:ext>
             </a:extLst>
           </p:cNvPr>
@@ -2345,7 +2345,7 @@
           <a:bodyPr/>
           <a:lstStyle/>
           <a:p>
-            <a:fld id="{CC3FA54E-4928-4FFA-9D76-E937EF1755C0}" type="slidenum">
+            <a:fld id="{C2F1D243-1A93-4A8E-B147-14285FFC3BFF}" type="slidenum">
               <a:rPr kumimoji="1" lang="ja-JP" altLang="en-US" smtClean="0"/>
               <a:t>‹#›</a:t>
             </a:fld>
@@ -2356,7 +2356,7 @@
     </p:spTree>
     <p:extLst>
       <p:ext uri="{BB962C8B-B14F-4D97-AF65-F5344CB8AC3E}">
-        <p14:creationId xmlns:p14="http://schemas.microsoft.com/office/powerpoint/2010/main" val="2472878961"/>
+        <p14:creationId xmlns:p14="http://schemas.microsoft.com/office/powerpoint/2010/main" val="827395309"/>
       </p:ext>
     </p:extLst>
   </p:cSld>
@@ -2388,7 +2388,7 @@
           <p:cNvPr id="2" name="タイトル 1">
             <a:extLst>
               <a:ext uri="{FF2B5EF4-FFF2-40B4-BE49-F238E27FC236}">
-                <a16:creationId xmlns:a16="http://schemas.microsoft.com/office/drawing/2014/main" id="{67902927-1DC4-4FD4-48AE-FB5705925D53}"/>
+                <a16:creationId xmlns:a16="http://schemas.microsoft.com/office/drawing/2014/main" id="{F1C45BE7-9047-0BAC-5CE3-F463CCDA16A3}"/>
               </a:ext>
             </a:extLst>
           </p:cNvPr>
@@ -2425,7 +2425,7 @@
           <p:cNvPr id="3" name="コンテンツ プレースホルダー 2">
             <a:extLst>
               <a:ext uri="{FF2B5EF4-FFF2-40B4-BE49-F238E27FC236}">
-                <a16:creationId xmlns:a16="http://schemas.microsoft.com/office/drawing/2014/main" id="{4F74B905-CCA3-C225-0D88-F68C2EDF95C8}"/>
+                <a16:creationId xmlns:a16="http://schemas.microsoft.com/office/drawing/2014/main" id="{E5D43372-B534-626C-0593-AC79067E0A1E}"/>
               </a:ext>
             </a:extLst>
           </p:cNvPr>
@@ -2547,7 +2547,7 @@
           <p:cNvPr id="4" name="テキスト プレースホルダー 3">
             <a:extLst>
               <a:ext uri="{FF2B5EF4-FFF2-40B4-BE49-F238E27FC236}">
-                <a16:creationId xmlns:a16="http://schemas.microsoft.com/office/drawing/2014/main" id="{77D46BA5-74DB-B69F-47BE-D6A596EC8A60}"/>
+                <a16:creationId xmlns:a16="http://schemas.microsoft.com/office/drawing/2014/main" id="{CB40A9C9-6C13-41E3-7F45-595635339746}"/>
               </a:ext>
             </a:extLst>
           </p:cNvPr>
@@ -2618,7 +2618,7 @@
           <p:cNvPr id="5" name="日付プレースホルダー 4">
             <a:extLst>
               <a:ext uri="{FF2B5EF4-FFF2-40B4-BE49-F238E27FC236}">
-                <a16:creationId xmlns:a16="http://schemas.microsoft.com/office/drawing/2014/main" id="{7E6EC877-F090-BDFD-43DA-C124A800487D}"/>
+                <a16:creationId xmlns:a16="http://schemas.microsoft.com/office/drawing/2014/main" id="{682E74CA-0043-B65A-059E-FC0ACD53D6A2}"/>
               </a:ext>
             </a:extLst>
           </p:cNvPr>
@@ -2634,7 +2634,7 @@
           <a:bodyPr/>
           <a:lstStyle/>
           <a:p>
-            <a:fld id="{C36CDBCC-E160-43B2-9087-7F26E330CFFF}" type="datetimeFigureOut">
+            <a:fld id="{D03F5CBC-68FC-41D2-8B0A-10598E32BEEB}" type="datetimeFigureOut">
               <a:rPr kumimoji="1" lang="ja-JP" altLang="en-US" smtClean="0"/>
               <a:t>2026/7/30</a:t>
             </a:fld>
@@ -2647,7 +2647,7 @@
           <p:cNvPr id="6" name="フッター プレースホルダー 5">
             <a:extLst>
               <a:ext uri="{FF2B5EF4-FFF2-40B4-BE49-F238E27FC236}">
-                <a16:creationId xmlns:a16="http://schemas.microsoft.com/office/drawing/2014/main" id="{9E9A35A4-13A8-FF47-055B-37355169A397}"/>
+                <a16:creationId xmlns:a16="http://schemas.microsoft.com/office/drawing/2014/main" id="{4AA3797C-DCA4-5876-B172-6CB02EAA49C2}"/>
               </a:ext>
             </a:extLst>
           </p:cNvPr>
@@ -2672,7 +2672,7 @@
           <p:cNvPr id="7" name="スライド番号プレースホルダー 6">
             <a:extLst>
               <a:ext uri="{FF2B5EF4-FFF2-40B4-BE49-F238E27FC236}">
-                <a16:creationId xmlns:a16="http://schemas.microsoft.com/office/drawing/2014/main" id="{B3B2FB99-4A77-8195-8123-B66590C933DD}"/>
+                <a16:creationId xmlns:a16="http://schemas.microsoft.com/office/drawing/2014/main" id="{55DDEA6F-7376-9663-6B86-F56BFB69193B}"/>
               </a:ext>
             </a:extLst>
           </p:cNvPr>
@@ -2688,7 +2688,7 @@
           <a:bodyPr/>
           <a:lstStyle/>
           <a:p>
-            <a:fld id="{CC3FA54E-4928-4FFA-9D76-E937EF1755C0}" type="slidenum">
+            <a:fld id="{C2F1D243-1A93-4A8E-B147-14285FFC3BFF}" type="slidenum">
               <a:rPr kumimoji="1" lang="ja-JP" altLang="en-US" smtClean="0"/>
               <a:t>‹#›</a:t>
             </a:fld>
@@ -2699,7 +2699,7 @@
     </p:spTree>
     <p:extLst>
       <p:ext uri="{BB962C8B-B14F-4D97-AF65-F5344CB8AC3E}">
-        <p14:creationId xmlns:p14="http://schemas.microsoft.com/office/powerpoint/2010/main" val="2663277158"/>
+        <p14:creationId xmlns:p14="http://schemas.microsoft.com/office/powerpoint/2010/main" val="141773362"/>
       </p:ext>
     </p:extLst>
   </p:cSld>
@@ -2731,7 +2731,7 @@
           <p:cNvPr id="2" name="タイトル 1">
             <a:extLst>
               <a:ext uri="{FF2B5EF4-FFF2-40B4-BE49-F238E27FC236}">
-                <a16:creationId xmlns:a16="http://schemas.microsoft.com/office/drawing/2014/main" id="{AF654CEE-8C9C-E044-E859-0FA979A7F9C1}"/>
+                <a16:creationId xmlns:a16="http://schemas.microsoft.com/office/drawing/2014/main" id="{9271E021-CD91-B9BA-24C0-065811ECC64C}"/>
               </a:ext>
             </a:extLst>
           </p:cNvPr>
@@ -2768,7 +2768,7 @@
           <p:cNvPr id="3" name="図プレースホルダー 2">
             <a:extLst>
               <a:ext uri="{FF2B5EF4-FFF2-40B4-BE49-F238E27FC236}">
-                <a16:creationId xmlns:a16="http://schemas.microsoft.com/office/drawing/2014/main" id="{3EC2373C-E754-94DD-1221-5AB77D81C0C9}"/>
+                <a16:creationId xmlns:a16="http://schemas.microsoft.com/office/drawing/2014/main" id="{8646C8B9-C9D0-0FD7-6F5D-9EC2F5CE2E0C}"/>
               </a:ext>
             </a:extLst>
           </p:cNvPr>
@@ -2835,7 +2835,7 @@
           <p:cNvPr id="4" name="テキスト プレースホルダー 3">
             <a:extLst>
               <a:ext uri="{FF2B5EF4-FFF2-40B4-BE49-F238E27FC236}">
-                <a16:creationId xmlns:a16="http://schemas.microsoft.com/office/drawing/2014/main" id="{B4E8857E-C5EC-3DBC-04FE-4A396CD5F812}"/>
+                <a16:creationId xmlns:a16="http://schemas.microsoft.com/office/drawing/2014/main" id="{91DC0759-D422-CAA1-5AF2-8595DCB09389}"/>
               </a:ext>
             </a:extLst>
           </p:cNvPr>
@@ -2906,7 +2906,7 @@
           <p:cNvPr id="5" name="日付プレースホルダー 4">
             <a:extLst>
               <a:ext uri="{FF2B5EF4-FFF2-40B4-BE49-F238E27FC236}">
-                <a16:creationId xmlns:a16="http://schemas.microsoft.com/office/drawing/2014/main" id="{7A2EDA3F-BB40-A940-15A0-F0DA61BD5150}"/>
+                <a16:creationId xmlns:a16="http://schemas.microsoft.com/office/drawing/2014/main" id="{3D675AF6-8890-2F40-20B2-BE1D93D91EAF}"/>
               </a:ext>
             </a:extLst>
           </p:cNvPr>
@@ -2922,7 +2922,7 @@
           <a:bodyPr/>
           <a:lstStyle/>
           <a:p>
-            <a:fld id="{C36CDBCC-E160-43B2-9087-7F26E330CFFF}" type="datetimeFigureOut">
+            <a:fld id="{D03F5CBC-68FC-41D2-8B0A-10598E32BEEB}" type="datetimeFigureOut">
               <a:rPr kumimoji="1" lang="ja-JP" altLang="en-US" smtClean="0"/>
               <a:t>2026/7/30</a:t>
             </a:fld>
@@ -2935,7 +2935,7 @@
           <p:cNvPr id="6" name="フッター プレースホルダー 5">
             <a:extLst>
               <a:ext uri="{FF2B5EF4-FFF2-40B4-BE49-F238E27FC236}">
-                <a16:creationId xmlns:a16="http://schemas.microsoft.com/office/drawing/2014/main" id="{3CF127D5-DB97-CA3E-D28B-437249785AC8}"/>
+                <a16:creationId xmlns:a16="http://schemas.microsoft.com/office/drawing/2014/main" id="{474A9C17-5E8C-497B-7C98-10868E1DBC8D}"/>
               </a:ext>
             </a:extLst>
           </p:cNvPr>
@@ -2960,7 +2960,7 @@
           <p:cNvPr id="7" name="スライド番号プレースホルダー 6">
             <a:extLst>
               <a:ext uri="{FF2B5EF4-FFF2-40B4-BE49-F238E27FC236}">
-                <a16:creationId xmlns:a16="http://schemas.microsoft.com/office/drawing/2014/main" id="{61247BC0-1CF5-A308-A3A8-CEA341CD8D95}"/>
+                <a16:creationId xmlns:a16="http://schemas.microsoft.com/office/drawing/2014/main" id="{DCCF0B16-5C97-BF46-89C8-6C548DC4B2B6}"/>
               </a:ext>
             </a:extLst>
           </p:cNvPr>
@@ -2976,7 +2976,7 @@
           <a:bodyPr/>
           <a:lstStyle/>
           <a:p>
-            <a:fld id="{CC3FA54E-4928-4FFA-9D76-E937EF1755C0}" type="slidenum">
+            <a:fld id="{C2F1D243-1A93-4A8E-B147-14285FFC3BFF}" type="slidenum">
               <a:rPr kumimoji="1" lang="ja-JP" altLang="en-US" smtClean="0"/>
               <a:t>‹#›</a:t>
             </a:fld>
@@ -2987,7 +2987,7 @@
     </p:spTree>
     <p:extLst>
       <p:ext uri="{BB962C8B-B14F-4D97-AF65-F5344CB8AC3E}">
-        <p14:creationId xmlns:p14="http://schemas.microsoft.com/office/powerpoint/2010/main" val="3728272238"/>
+        <p14:creationId xmlns:p14="http://schemas.microsoft.com/office/powerpoint/2010/main" val="3748745785"/>
       </p:ext>
     </p:extLst>
   </p:cSld>
@@ -3024,7 +3024,7 @@
           <p:cNvPr id="2" name="タイトル プレースホルダー 1">
             <a:extLst>
               <a:ext uri="{FF2B5EF4-FFF2-40B4-BE49-F238E27FC236}">
-                <a16:creationId xmlns:a16="http://schemas.microsoft.com/office/drawing/2014/main" id="{B812E86B-A284-789D-ECD8-6BB73834FC4D}"/>
+                <a16:creationId xmlns:a16="http://schemas.microsoft.com/office/drawing/2014/main" id="{16894567-E848-D514-CBE6-92D958EF5D5B}"/>
               </a:ext>
             </a:extLst>
           </p:cNvPr>
@@ -3062,7 +3062,7 @@
           <p:cNvPr id="3" name="テキスト プレースホルダー 2">
             <a:extLst>
               <a:ext uri="{FF2B5EF4-FFF2-40B4-BE49-F238E27FC236}">
-                <a16:creationId xmlns:a16="http://schemas.microsoft.com/office/drawing/2014/main" id="{9B11CDAB-6540-A4D6-B13B-7393009C774C}"/>
+                <a16:creationId xmlns:a16="http://schemas.microsoft.com/office/drawing/2014/main" id="{C7D24A5F-1EC7-E5E5-E1B4-07B86CFA96EB}"/>
               </a:ext>
             </a:extLst>
           </p:cNvPr>
@@ -3161,7 +3161,7 @@
           <p:cNvPr id="4" name="日付プレースホルダー 3">
             <a:extLst>
               <a:ext uri="{FF2B5EF4-FFF2-40B4-BE49-F238E27FC236}">
-                <a16:creationId xmlns:a16="http://schemas.microsoft.com/office/drawing/2014/main" id="{D083B9F1-CF0C-17E2-1DAD-CA6C466E9752}"/>
+                <a16:creationId xmlns:a16="http://schemas.microsoft.com/office/drawing/2014/main" id="{19D3D1D3-DD50-E96D-0C2A-01E869944966}"/>
               </a:ext>
             </a:extLst>
           </p:cNvPr>
@@ -3195,7 +3195,7 @@
             </a:lvl1pPr>
           </a:lstStyle>
           <a:p>
-            <a:fld id="{C36CDBCC-E160-43B2-9087-7F26E330CFFF}" type="datetimeFigureOut">
+            <a:fld id="{D03F5CBC-68FC-41D2-8B0A-10598E32BEEB}" type="datetimeFigureOut">
               <a:rPr kumimoji="1" lang="ja-JP" altLang="en-US" smtClean="0"/>
               <a:t>2026/7/30</a:t>
             </a:fld>
@@ -3208,7 +3208,7 @@
           <p:cNvPr id="5" name="フッター プレースホルダー 4">
             <a:extLst>
               <a:ext uri="{FF2B5EF4-FFF2-40B4-BE49-F238E27FC236}">
-                <a16:creationId xmlns:a16="http://schemas.microsoft.com/office/drawing/2014/main" id="{E7DC8680-6E3E-212B-7767-514AFA327487}"/>
+                <a16:creationId xmlns:a16="http://schemas.microsoft.com/office/drawing/2014/main" id="{517F68D7-13BC-7DFD-D6BD-F2C56E6CC06A}"/>
               </a:ext>
             </a:extLst>
           </p:cNvPr>
@@ -3251,7 +3251,7 @@
           <p:cNvPr id="6" name="スライド番号プレースホルダー 5">
             <a:extLst>
               <a:ext uri="{FF2B5EF4-FFF2-40B4-BE49-F238E27FC236}">
-                <a16:creationId xmlns:a16="http://schemas.microsoft.com/office/drawing/2014/main" id="{2A63A669-895F-60FE-5E44-2F9D1315CAED}"/>
+                <a16:creationId xmlns:a16="http://schemas.microsoft.com/office/drawing/2014/main" id="{BE804FE5-CC6D-5F5E-0861-96165FAC6C0C}"/>
               </a:ext>
             </a:extLst>
           </p:cNvPr>
@@ -3285,7 +3285,7 @@
             </a:lvl1pPr>
           </a:lstStyle>
           <a:p>
-            <a:fld id="{CC3FA54E-4928-4FFA-9D76-E937EF1755C0}" type="slidenum">
+            <a:fld id="{C2F1D243-1A93-4A8E-B147-14285FFC3BFF}" type="slidenum">
               <a:rPr kumimoji="1" lang="ja-JP" altLang="en-US" smtClean="0"/>
               <a:t>‹#›</a:t>
             </a:fld>
@@ -3296,7 +3296,7 @@
     </p:spTree>
     <p:extLst>
       <p:ext uri="{BB962C8B-B14F-4D97-AF65-F5344CB8AC3E}">
-        <p14:creationId xmlns:p14="http://schemas.microsoft.com/office/powerpoint/2010/main" val="3186544214"/>
+        <p14:creationId xmlns:p14="http://schemas.microsoft.com/office/powerpoint/2010/main" val="2928003308"/>
       </p:ext>
     </p:extLst>
   </p:cSld>
@@ -3619,7 +3619,7 @@
           <p:cNvPr id="2" name="テキスト ボックス 1">
             <a:extLst>
               <a:ext uri="{FF2B5EF4-FFF2-40B4-BE49-F238E27FC236}">
-                <a16:creationId xmlns:a16="http://schemas.microsoft.com/office/drawing/2014/main" id="{C9877249-4375-49B8-CBEA-658830A4B326}"/>
+                <a16:creationId xmlns:a16="http://schemas.microsoft.com/office/drawing/2014/main" id="{9F679579-5E76-2680-3FD8-7607004C97FA}"/>
               </a:ext>
             </a:extLst>
           </p:cNvPr>
@@ -3665,7 +3665,7 @@
           <p:cNvPr id="3" name="テキスト ボックス 2">
             <a:extLst>
               <a:ext uri="{FF2B5EF4-FFF2-40B4-BE49-F238E27FC236}">
-                <a16:creationId xmlns:a16="http://schemas.microsoft.com/office/drawing/2014/main" id="{B74B7237-7ED1-520E-9DF2-893809718D7A}"/>
+                <a16:creationId xmlns:a16="http://schemas.microsoft.com/office/drawing/2014/main" id="{DA1E29F9-FB51-0586-014F-99D6D3ECBEF8}"/>
               </a:ext>
             </a:extLst>
           </p:cNvPr>
@@ -3695,14 +3695,17 @@
                 </a:solidFill>
                 <a:latin typeface="Arial" panose="020B0604020202020204" pitchFamily="34" charset="0"/>
               </a:rPr>
-              <a:t>goal-pilot-app TECH EXPLANATION</a:t>
-            </a:r>
-            <a:endParaRPr kumimoji="1" lang="ja-JP" altLang="en-US" sz="3400" b="1">
-              <a:solidFill>
-                <a:srgbClr val="111111"/>
-              </a:solidFill>
-              <a:latin typeface="Arial" panose="020B0604020202020204" pitchFamily="34" charset="0"/>
-            </a:endParaRPr>
+              <a:t>Goal Pilot App</a:t>
+            </a:r>
+            <a:r>
+              <a:rPr kumimoji="1" lang="ja-JP" altLang="en-US" sz="3400" b="1">
+                <a:solidFill>
+                  <a:srgbClr val="111111"/>
+                </a:solidFill>
+                <a:latin typeface="Arial" panose="020B0604020202020204" pitchFamily="34" charset="0"/>
+              </a:rPr>
+              <a:t>の技術解説</a:t>
+            </a:r>
           </a:p>
         </p:txBody>
       </p:sp>
@@ -3711,7 +3714,7 @@
           <p:cNvPr id="4" name="テキスト ボックス 3">
             <a:extLst>
               <a:ext uri="{FF2B5EF4-FFF2-40B4-BE49-F238E27FC236}">
-                <a16:creationId xmlns:a16="http://schemas.microsoft.com/office/drawing/2014/main" id="{E3682092-D694-D114-0207-F73F39A97D37}"/>
+                <a16:creationId xmlns:a16="http://schemas.microsoft.com/office/drawing/2014/main" id="{AFBE0EDB-DBD0-A9BF-B900-6D8EB7DCEEE7}"/>
               </a:ext>
             </a:extLst>
           </p:cNvPr>
@@ -3735,20 +3738,14 @@
           <a:lstStyle/>
           <a:p>
             <a:r>
-              <a:rPr kumimoji="1" lang="en-US" altLang="ja-JP" sz="2000">
+              <a:rPr kumimoji="1" lang="ja-JP" altLang="en-US" sz="2000">
                 <a:solidFill>
                   <a:srgbClr val="333333"/>
                 </a:solidFill>
                 <a:latin typeface="Arial" panose="020B0604020202020204" pitchFamily="34" charset="0"/>
               </a:rPr>
-              <a:t>Architecture, implementation and commit history in 75 seconds</a:t>
-            </a:r>
-            <a:endParaRPr kumimoji="1" lang="ja-JP" altLang="en-US" sz="2000">
-              <a:solidFill>
-                <a:srgbClr val="333333"/>
-              </a:solidFill>
-              <a:latin typeface="Arial" panose="020B0604020202020204" pitchFamily="34" charset="0"/>
-            </a:endParaRPr>
+              <a:t>設計・実装・コミットから学ぶ短時間プレビュー</a:t>
+            </a:r>
           </a:p>
         </p:txBody>
       </p:sp>
@@ -3757,7 +3754,7 @@
           <p:cNvPr id="5" name="テキスト ボックス 4">
             <a:extLst>
               <a:ext uri="{FF2B5EF4-FFF2-40B4-BE49-F238E27FC236}">
-                <a16:creationId xmlns:a16="http://schemas.microsoft.com/office/drawing/2014/main" id="{179592C7-B8BA-6F41-8E1D-04A8F609741D}"/>
+                <a16:creationId xmlns:a16="http://schemas.microsoft.com/office/drawing/2014/main" id="{B97E555B-3FC7-3910-316B-A572EA7505D8}"/>
               </a:ext>
             </a:extLst>
           </p:cNvPr>
@@ -3804,7 +3801,7 @@
             <a:hlinkClick r:id="" action="ppaction://media"/>
             <a:extLst>
               <a:ext uri="{FF2B5EF4-FFF2-40B4-BE49-F238E27FC236}">
-                <a16:creationId xmlns:a16="http://schemas.microsoft.com/office/drawing/2014/main" id="{C8C73D67-7353-DF27-E449-C785E113F33A}"/>
+                <a16:creationId xmlns:a16="http://schemas.microsoft.com/office/drawing/2014/main" id="{29E8D2CA-7B8D-C3D6-C643-6AF417A73082}"/>
               </a:ext>
             </a:extLst>
           </p:cNvPr>
@@ -3839,7 +3836,7 @@
     </p:spTree>
     <p:extLst>
       <p:ext uri="{BB962C8B-B14F-4D97-AF65-F5344CB8AC3E}">
-        <p14:creationId xmlns:p14="http://schemas.microsoft.com/office/powerpoint/2010/main" val="2952893186"/>
+        <p14:creationId xmlns:p14="http://schemas.microsoft.com/office/powerpoint/2010/main" val="917419520"/>
       </p:ext>
     </p:extLst>
   </p:cSld>
@@ -3963,7 +3960,7 @@
           <p:cNvPr id="2" name="テキスト ボックス 1">
             <a:extLst>
               <a:ext uri="{FF2B5EF4-FFF2-40B4-BE49-F238E27FC236}">
-                <a16:creationId xmlns:a16="http://schemas.microsoft.com/office/drawing/2014/main" id="{34C450FA-924E-1B0E-66FA-B7B8CFE85D7D}"/>
+                <a16:creationId xmlns:a16="http://schemas.microsoft.com/office/drawing/2014/main" id="{AA320A0B-B262-2247-5A8E-8C3453903CB0}"/>
               </a:ext>
             </a:extLst>
           </p:cNvPr>
@@ -4009,7 +4006,7 @@
           <p:cNvPr id="3" name="テキスト ボックス 2">
             <a:extLst>
               <a:ext uri="{FF2B5EF4-FFF2-40B4-BE49-F238E27FC236}">
-                <a16:creationId xmlns:a16="http://schemas.microsoft.com/office/drawing/2014/main" id="{FF03FED5-874E-35AB-F958-B00D5D54BB78}"/>
+                <a16:creationId xmlns:a16="http://schemas.microsoft.com/office/drawing/2014/main" id="{4BD51AA8-6714-1861-F93E-A02366EC6DEE}"/>
               </a:ext>
             </a:extLst>
           </p:cNvPr>
@@ -4033,20 +4030,14 @@
           <a:lstStyle/>
           <a:p>
             <a:r>
-              <a:rPr kumimoji="1" lang="en-US" altLang="ja-JP" sz="3400" b="1">
+              <a:rPr kumimoji="1" lang="ja-JP" altLang="en-US" sz="3400" b="1">
                 <a:solidFill>
                   <a:srgbClr val="111111"/>
                 </a:solidFill>
                 <a:latin typeface="Arial" panose="020B0604020202020204" pitchFamily="34" charset="0"/>
               </a:rPr>
-              <a:t>WHAT DOES IT SOLVE?</a:t>
-            </a:r>
-            <a:endParaRPr kumimoji="1" lang="ja-JP" altLang="en-US" sz="3400" b="1">
-              <a:solidFill>
-                <a:srgbClr val="111111"/>
-              </a:solidFill>
-              <a:latin typeface="Arial" panose="020B0604020202020204" pitchFamily="34" charset="0"/>
-            </a:endParaRPr>
+              <a:t>このプロジェクトは何を解決する？</a:t>
+            </a:r>
           </a:p>
         </p:txBody>
       </p:sp>
@@ -4055,7 +4046,7 @@
           <p:cNvPr id="4" name="テキスト ボックス 3">
             <a:extLst>
               <a:ext uri="{FF2B5EF4-FFF2-40B4-BE49-F238E27FC236}">
-                <a16:creationId xmlns:a16="http://schemas.microsoft.com/office/drawing/2014/main" id="{1FAC3EAC-424B-6923-071A-B8E06372A1DA}"/>
+                <a16:creationId xmlns:a16="http://schemas.microsoft.com/office/drawing/2014/main" id="{CED2D45E-46C5-5F40-7FF9-D5F496814B14}"/>
               </a:ext>
             </a:extLst>
           </p:cNvPr>
@@ -4101,7 +4092,7 @@
           <p:cNvPr id="5" name="テキスト ボックス 4">
             <a:extLst>
               <a:ext uri="{FF2B5EF4-FFF2-40B4-BE49-F238E27FC236}">
-                <a16:creationId xmlns:a16="http://schemas.microsoft.com/office/drawing/2014/main" id="{AF6CBDB5-151A-4F40-6769-2839DCD5973F}"/>
+                <a16:creationId xmlns:a16="http://schemas.microsoft.com/office/drawing/2014/main" id="{F1809B97-4737-420B-683C-066B2893B276}"/>
               </a:ext>
             </a:extLst>
           </p:cNvPr>
@@ -4148,7 +4139,7 @@
             <a:hlinkClick r:id="" action="ppaction://media"/>
             <a:extLst>
               <a:ext uri="{FF2B5EF4-FFF2-40B4-BE49-F238E27FC236}">
-                <a16:creationId xmlns:a16="http://schemas.microsoft.com/office/drawing/2014/main" id="{6AE89850-25E6-AC9C-0AD1-BE81D72446A3}"/>
+                <a16:creationId xmlns:a16="http://schemas.microsoft.com/office/drawing/2014/main" id="{50094F5B-EEFF-E4D9-7F24-FEA7603B9E85}"/>
               </a:ext>
             </a:extLst>
           </p:cNvPr>
@@ -4183,7 +4174,7 @@
     </p:spTree>
     <p:extLst>
       <p:ext uri="{BB962C8B-B14F-4D97-AF65-F5344CB8AC3E}">
-        <p14:creationId xmlns:p14="http://schemas.microsoft.com/office/powerpoint/2010/main" val="1757415519"/>
+        <p14:creationId xmlns:p14="http://schemas.microsoft.com/office/powerpoint/2010/main" val="3645476774"/>
       </p:ext>
     </p:extLst>
   </p:cSld>
@@ -4307,7 +4298,7 @@
           <p:cNvPr id="2" name="テキスト ボックス 1">
             <a:extLst>
               <a:ext uri="{FF2B5EF4-FFF2-40B4-BE49-F238E27FC236}">
-                <a16:creationId xmlns:a16="http://schemas.microsoft.com/office/drawing/2014/main" id="{FA694D45-465A-129E-D472-F92BF54AA809}"/>
+                <a16:creationId xmlns:a16="http://schemas.microsoft.com/office/drawing/2014/main" id="{E89A966D-F231-487B-0803-CF8826295503}"/>
               </a:ext>
             </a:extLst>
           </p:cNvPr>
@@ -4353,7 +4344,7 @@
           <p:cNvPr id="3" name="テキスト ボックス 2">
             <a:extLst>
               <a:ext uri="{FF2B5EF4-FFF2-40B4-BE49-F238E27FC236}">
-                <a16:creationId xmlns:a16="http://schemas.microsoft.com/office/drawing/2014/main" id="{23F4473D-0608-F6ED-57B2-D1A93F23B1EC}"/>
+                <a16:creationId xmlns:a16="http://schemas.microsoft.com/office/drawing/2014/main" id="{E5F8B56A-C15C-5FF0-1046-3BAADE5517B5}"/>
               </a:ext>
             </a:extLst>
           </p:cNvPr>
@@ -4377,20 +4368,14 @@
           <a:lstStyle/>
           <a:p>
             <a:r>
-              <a:rPr kumimoji="1" lang="en-US" altLang="ja-JP" sz="3400" b="1">
+              <a:rPr kumimoji="1" lang="ja-JP" altLang="en-US" sz="3400" b="1">
                 <a:solidFill>
                   <a:srgbClr val="111111"/>
                 </a:solidFill>
                 <a:latin typeface="Arial" panose="020B0604020202020204" pitchFamily="34" charset="0"/>
               </a:rPr>
-              <a:t>TECH STACK</a:t>
-            </a:r>
-            <a:endParaRPr kumimoji="1" lang="ja-JP" altLang="en-US" sz="3400" b="1">
-              <a:solidFill>
-                <a:srgbClr val="111111"/>
-              </a:solidFill>
-              <a:latin typeface="Arial" panose="020B0604020202020204" pitchFamily="34" charset="0"/>
-            </a:endParaRPr>
+              <a:t>技術スタック</a:t>
+            </a:r>
           </a:p>
         </p:txBody>
       </p:sp>
@@ -4399,7 +4384,7 @@
           <p:cNvPr id="4" name="テキスト ボックス 3">
             <a:extLst>
               <a:ext uri="{FF2B5EF4-FFF2-40B4-BE49-F238E27FC236}">
-                <a16:creationId xmlns:a16="http://schemas.microsoft.com/office/drawing/2014/main" id="{C330FF4D-1737-D684-0AAE-58AA4B96D992}"/>
+                <a16:creationId xmlns:a16="http://schemas.microsoft.com/office/drawing/2014/main" id="{7E9AF7C8-0A23-6C10-028A-FFDD29A8EA53}"/>
               </a:ext>
             </a:extLst>
           </p:cNvPr>
@@ -4409,7 +4394,7 @@
         <p:spPr>
           <a:xfrm>
             <a:off x="533400" y="3429000"/>
-            <a:ext cx="10795000" cy="400110"/>
+            <a:ext cx="10795000" cy="707886"/>
           </a:xfrm>
           <a:prstGeom prst="rect">
             <a:avLst/>
@@ -4423,13 +4408,22 @@
           <a:lstStyle/>
           <a:p>
             <a:r>
+              <a:rPr kumimoji="1" lang="ja-JP" altLang="en-US" sz="2000">
+                <a:solidFill>
+                  <a:srgbClr val="333333"/>
+                </a:solidFill>
+                <a:latin typeface="Arial" panose="020B0604020202020204" pitchFamily="34" charset="0"/>
+              </a:rPr>
+              <a:t>主要技術：</a:t>
+            </a:r>
+            <a:r>
               <a:rPr kumimoji="1" lang="en-US" altLang="ja-JP" sz="2000">
                 <a:solidFill>
                   <a:srgbClr val="333333"/>
                 </a:solidFill>
                 <a:latin typeface="Arial" panose="020B0604020202020204" pitchFamily="34" charset="0"/>
               </a:rPr>
-              <a:t>Primary technologies: TypeScript</a:t>
+              <a:t>TypeScript</a:t>
             </a:r>
             <a:r>
               <a:rPr kumimoji="1" lang="ja-JP" altLang="en-US" sz="2000">
@@ -4465,14 +4459,18 @@
                 </a:solidFill>
                 <a:latin typeface="Arial" panose="020B0604020202020204" pitchFamily="34" charset="0"/>
               </a:rPr>
-              <a:t>Java</a:t>
-            </a:r>
-            <a:endParaRPr kumimoji="1" lang="ja-JP" altLang="en-US" sz="2000">
-              <a:solidFill>
-                <a:srgbClr val="333333"/>
-              </a:solidFill>
-              <a:latin typeface="Arial" panose="020B0604020202020204" pitchFamily="34" charset="0"/>
-            </a:endParaRPr>
+              <a:t>Java
+</a:t>
+            </a:r>
+            <a:r>
+              <a:rPr kumimoji="1" lang="ja-JP" altLang="en-US" sz="2000">
+                <a:solidFill>
+                  <a:srgbClr val="333333"/>
+                </a:solidFill>
+                <a:latin typeface="Arial" panose="020B0604020202020204" pitchFamily="34" charset="0"/>
+              </a:rPr>
+              <a:t>役割を分け、保守しやすい構成を目指しています。</a:t>
+            </a:r>
           </a:p>
         </p:txBody>
       </p:sp>
@@ -4481,7 +4479,7 @@
           <p:cNvPr id="5" name="テキスト ボックス 4">
             <a:extLst>
               <a:ext uri="{FF2B5EF4-FFF2-40B4-BE49-F238E27FC236}">
-                <a16:creationId xmlns:a16="http://schemas.microsoft.com/office/drawing/2014/main" id="{9B910908-8CD3-ABA0-DFD7-D233672A8822}"/>
+                <a16:creationId xmlns:a16="http://schemas.microsoft.com/office/drawing/2014/main" id="{250B87FF-11F6-70DD-C8CE-DEF1F46C0383}"/>
               </a:ext>
             </a:extLst>
           </p:cNvPr>
@@ -4528,7 +4526,7 @@
             <a:hlinkClick r:id="" action="ppaction://media"/>
             <a:extLst>
               <a:ext uri="{FF2B5EF4-FFF2-40B4-BE49-F238E27FC236}">
-                <a16:creationId xmlns:a16="http://schemas.microsoft.com/office/drawing/2014/main" id="{A7919549-3EBD-CF26-E1CC-8537162FD74B}"/>
+                <a16:creationId xmlns:a16="http://schemas.microsoft.com/office/drawing/2014/main" id="{9DED06EB-E392-85F9-124C-A7C205B8AA0A}"/>
               </a:ext>
             </a:extLst>
           </p:cNvPr>
@@ -4563,7 +4561,7 @@
     </p:spTree>
     <p:extLst>
       <p:ext uri="{BB962C8B-B14F-4D97-AF65-F5344CB8AC3E}">
-        <p14:creationId xmlns:p14="http://schemas.microsoft.com/office/powerpoint/2010/main" val="2731568807"/>
+        <p14:creationId xmlns:p14="http://schemas.microsoft.com/office/powerpoint/2010/main" val="3960260016"/>
       </p:ext>
     </p:extLst>
   </p:cSld>
@@ -4687,7 +4685,7 @@
           <p:cNvPr id="2" name="テキスト ボックス 1">
             <a:extLst>
               <a:ext uri="{FF2B5EF4-FFF2-40B4-BE49-F238E27FC236}">
-                <a16:creationId xmlns:a16="http://schemas.microsoft.com/office/drawing/2014/main" id="{B9551955-0FF7-E83C-C0FB-9FC203485EF0}"/>
+                <a16:creationId xmlns:a16="http://schemas.microsoft.com/office/drawing/2014/main" id="{25227128-2B47-CD85-EAC2-30E3FCBE6932}"/>
               </a:ext>
             </a:extLst>
           </p:cNvPr>
@@ -4733,7 +4731,7 @@
           <p:cNvPr id="3" name="テキスト ボックス 2">
             <a:extLst>
               <a:ext uri="{FF2B5EF4-FFF2-40B4-BE49-F238E27FC236}">
-                <a16:creationId xmlns:a16="http://schemas.microsoft.com/office/drawing/2014/main" id="{D08FC8CA-121C-E692-EB7B-28225F24DDA8}"/>
+                <a16:creationId xmlns:a16="http://schemas.microsoft.com/office/drawing/2014/main" id="{CC0F88DA-1B83-C1CD-F55A-958F37393EE2}"/>
               </a:ext>
             </a:extLst>
           </p:cNvPr>
@@ -4757,20 +4755,14 @@
           <a:lstStyle/>
           <a:p>
             <a:r>
-              <a:rPr kumimoji="1" lang="en-US" altLang="ja-JP" sz="3400" b="1">
+              <a:rPr kumimoji="1" lang="ja-JP" altLang="en-US" sz="3400" b="1">
                 <a:solidFill>
                   <a:srgbClr val="111111"/>
                 </a:solidFill>
                 <a:latin typeface="Arial" panose="020B0604020202020204" pitchFamily="34" charset="0"/>
               </a:rPr>
-              <a:t>REPOSITORY HIGHLIGHTS</a:t>
-            </a:r>
-            <a:endParaRPr kumimoji="1" lang="ja-JP" altLang="en-US" sz="3400" b="1">
-              <a:solidFill>
-                <a:srgbClr val="111111"/>
-              </a:solidFill>
-              <a:latin typeface="Arial" panose="020B0604020202020204" pitchFamily="34" charset="0"/>
-            </a:endParaRPr>
+              <a:t>リポジトリの読みどころ</a:t>
+            </a:r>
           </a:p>
         </p:txBody>
       </p:sp>
@@ -4779,7 +4771,7 @@
           <p:cNvPr id="4" name="テキスト ボックス 3">
             <a:extLst>
               <a:ext uri="{FF2B5EF4-FFF2-40B4-BE49-F238E27FC236}">
-                <a16:creationId xmlns:a16="http://schemas.microsoft.com/office/drawing/2014/main" id="{9626FF46-C810-C3BF-2C61-A70EAE926AF1}"/>
+                <a16:creationId xmlns:a16="http://schemas.microsoft.com/office/drawing/2014/main" id="{17731C9A-33F9-9548-9A2A-A14C16595907}"/>
               </a:ext>
             </a:extLst>
           </p:cNvPr>
@@ -4789,7 +4781,7 @@
         <p:spPr>
           <a:xfrm>
             <a:off x="533400" y="3429000"/>
-            <a:ext cx="10795000" cy="400110"/>
+            <a:ext cx="10795000" cy="707886"/>
           </a:xfrm>
           <a:prstGeom prst="rect">
             <a:avLst/>
@@ -4803,13 +4795,77 @@
           <a:lstStyle/>
           <a:p>
             <a:r>
+              <a:rPr kumimoji="1" lang="ja-JP" altLang="en-US" sz="2000">
+                <a:solidFill>
+                  <a:srgbClr val="333333"/>
+                </a:solidFill>
+                <a:latin typeface="Arial" panose="020B0604020202020204" pitchFamily="34" charset="0"/>
+              </a:rPr>
+              <a:t>公開コード、</a:t>
+            </a:r>
+            <a:r>
               <a:rPr kumimoji="1" lang="en-US" altLang="ja-JP" sz="2000">
                 <a:solidFill>
                   <a:srgbClr val="333333"/>
                 </a:solidFill>
                 <a:latin typeface="Arial" panose="020B0604020202020204" pitchFamily="34" charset="0"/>
               </a:rPr>
-              <a:t>Public source code, README and commit history reveal the design decisions.</a:t>
+              <a:t>README</a:t>
+            </a:r>
+            <a:r>
+              <a:rPr kumimoji="1" lang="ja-JP" altLang="en-US" sz="2000">
+                <a:solidFill>
+                  <a:srgbClr val="333333"/>
+                </a:solidFill>
+                <a:latin typeface="Arial" panose="020B0604020202020204" pitchFamily="34" charset="0"/>
+              </a:rPr>
+              <a:t>、コミット履歴から設計判断を確認できます。
+主なファイル：</a:t>
+            </a:r>
+            <a:r>
+              <a:rPr kumimoji="1" lang="en-US" altLang="ja-JP" sz="2000">
+                <a:solidFill>
+                  <a:srgbClr val="333333"/>
+                </a:solidFill>
+                <a:latin typeface="Arial" panose="020B0604020202020204" pitchFamily="34" charset="0"/>
+              </a:rPr>
+              <a:t>README.md</a:t>
+            </a:r>
+            <a:r>
+              <a:rPr kumimoji="1" lang="ja-JP" altLang="en-US" sz="2000">
+                <a:solidFill>
+                  <a:srgbClr val="333333"/>
+                </a:solidFill>
+                <a:latin typeface="Arial" panose="020B0604020202020204" pitchFamily="34" charset="0"/>
+              </a:rPr>
+              <a:t>、</a:t>
+            </a:r>
+            <a:r>
+              <a:rPr kumimoji="1" lang="en-US" altLang="ja-JP" sz="2000">
+                <a:solidFill>
+                  <a:srgbClr val="333333"/>
+                </a:solidFill>
+                <a:latin typeface="Arial" panose="020B0604020202020204" pitchFamily="34" charset="0"/>
+              </a:rPr>
+              <a:t>android</a:t>
+            </a:r>
+            <a:r>
+              <a:rPr kumimoji="1" lang="ja-JP" altLang="en-US" sz="2000">
+                <a:solidFill>
+                  <a:srgbClr val="333333"/>
+                </a:solidFill>
+                <a:latin typeface="Arial" panose="020B0604020202020204" pitchFamily="34" charset="0"/>
+              </a:rPr>
+              <a:t>、</a:t>
+            </a:r>
+            <a:r>
+              <a:rPr kumimoji="1" lang="en-US" altLang="ja-JP" sz="2000">
+                <a:solidFill>
+                  <a:srgbClr val="333333"/>
+                </a:solidFill>
+                <a:latin typeface="Arial" panose="020B0604020202020204" pitchFamily="34" charset="0"/>
+              </a:rPr>
+              <a:t>app</a:t>
             </a:r>
             <a:endParaRPr kumimoji="1" lang="ja-JP" altLang="en-US" sz="2000">
               <a:solidFill>
@@ -4825,7 +4881,7 @@
           <p:cNvPr id="5" name="テキスト ボックス 4">
             <a:extLst>
               <a:ext uri="{FF2B5EF4-FFF2-40B4-BE49-F238E27FC236}">
-                <a16:creationId xmlns:a16="http://schemas.microsoft.com/office/drawing/2014/main" id="{37D1A3F9-3FDA-2280-84B4-262FD2B81C37}"/>
+                <a16:creationId xmlns:a16="http://schemas.microsoft.com/office/drawing/2014/main" id="{405238F8-188F-A7FD-E5B9-4462152D19F2}"/>
               </a:ext>
             </a:extLst>
           </p:cNvPr>
@@ -4872,7 +4928,7 @@
             <a:hlinkClick r:id="" action="ppaction://media"/>
             <a:extLst>
               <a:ext uri="{FF2B5EF4-FFF2-40B4-BE49-F238E27FC236}">
-                <a16:creationId xmlns:a16="http://schemas.microsoft.com/office/drawing/2014/main" id="{E08CD7A6-4194-9403-B813-02A80C7D982C}"/>
+                <a16:creationId xmlns:a16="http://schemas.microsoft.com/office/drawing/2014/main" id="{8F3CD4C5-A324-5033-8FFC-B34B5A1A7013}"/>
               </a:ext>
             </a:extLst>
           </p:cNvPr>
@@ -4907,7 +4963,7 @@
     </p:spTree>
     <p:extLst>
       <p:ext uri="{BB962C8B-B14F-4D97-AF65-F5344CB8AC3E}">
-        <p14:creationId xmlns:p14="http://schemas.microsoft.com/office/powerpoint/2010/main" val="1803815367"/>
+        <p14:creationId xmlns:p14="http://schemas.microsoft.com/office/powerpoint/2010/main" val="2087462055"/>
       </p:ext>
     </p:extLst>
   </p:cSld>
@@ -5031,7 +5087,7 @@
           <p:cNvPr id="2" name="テキスト ボックス 1">
             <a:extLst>
               <a:ext uri="{FF2B5EF4-FFF2-40B4-BE49-F238E27FC236}">
-                <a16:creationId xmlns:a16="http://schemas.microsoft.com/office/drawing/2014/main" id="{6A6F98DB-039B-3FC7-AC05-F50FEFED5716}"/>
+                <a16:creationId xmlns:a16="http://schemas.microsoft.com/office/drawing/2014/main" id="{E1698652-2E17-6D8D-8F3E-8603CA7FA2CA}"/>
               </a:ext>
             </a:extLst>
           </p:cNvPr>
@@ -5077,7 +5133,7 @@
           <p:cNvPr id="3" name="テキスト ボックス 2">
             <a:extLst>
               <a:ext uri="{FF2B5EF4-FFF2-40B4-BE49-F238E27FC236}">
-                <a16:creationId xmlns:a16="http://schemas.microsoft.com/office/drawing/2014/main" id="{55B2A033-BC3C-8DBE-B2FB-AF813567F9CE}"/>
+                <a16:creationId xmlns:a16="http://schemas.microsoft.com/office/drawing/2014/main" id="{A8075426-2223-ECA3-9A7C-FBD24E68BBD9}"/>
               </a:ext>
             </a:extLst>
           </p:cNvPr>
@@ -5101,20 +5157,14 @@
           <a:lstStyle/>
           <a:p>
             <a:r>
-              <a:rPr kumimoji="1" lang="en-US" altLang="ja-JP" sz="3400" b="1">
+              <a:rPr kumimoji="1" lang="ja-JP" altLang="en-US" sz="3400" b="1">
                 <a:solidFill>
                   <a:srgbClr val="111111"/>
                 </a:solidFill>
                 <a:latin typeface="Arial" panose="020B0604020202020204" pitchFamily="34" charset="0"/>
               </a:rPr>
-              <a:t>ITERATIVE IMPROVEMENT</a:t>
-            </a:r>
-            <a:endParaRPr kumimoji="1" lang="ja-JP" altLang="en-US" sz="3400" b="1">
-              <a:solidFill>
-                <a:srgbClr val="111111"/>
-              </a:solidFill>
-              <a:latin typeface="Arial" panose="020B0604020202020204" pitchFamily="34" charset="0"/>
-            </a:endParaRPr>
+              <a:t>コミットから分かる改善</a:t>
+            </a:r>
           </a:p>
         </p:txBody>
       </p:sp>
@@ -5123,7 +5173,7 @@
           <p:cNvPr id="4" name="テキスト ボックス 3">
             <a:extLst>
               <a:ext uri="{FF2B5EF4-FFF2-40B4-BE49-F238E27FC236}">
-                <a16:creationId xmlns:a16="http://schemas.microsoft.com/office/drawing/2014/main" id="{6FE513F2-47BC-3425-68D9-4DD514E26A81}"/>
+                <a16:creationId xmlns:a16="http://schemas.microsoft.com/office/drawing/2014/main" id="{05658EB6-2CE5-E302-810B-82C094B0909E}"/>
               </a:ext>
             </a:extLst>
           </p:cNvPr>
@@ -5153,7 +5203,7 @@
                 </a:solidFill>
                 <a:latin typeface="Arial" panose="020B0604020202020204" pitchFamily="34" charset="0"/>
               </a:rPr>
-              <a:t>Small commits continuously improve features, quality and release readiness.</a:t>
+              <a:t>Add sitemap.xml and robots.txt for SEO crawlability</a:t>
             </a:r>
             <a:endParaRPr kumimoji="1" lang="ja-JP" altLang="en-US" sz="2000">
               <a:solidFill>
@@ -5169,7 +5219,7 @@
           <p:cNvPr id="5" name="テキスト ボックス 4">
             <a:extLst>
               <a:ext uri="{FF2B5EF4-FFF2-40B4-BE49-F238E27FC236}">
-                <a16:creationId xmlns:a16="http://schemas.microsoft.com/office/drawing/2014/main" id="{34E113D5-5E85-FF8B-C33C-4077582632CE}"/>
+                <a16:creationId xmlns:a16="http://schemas.microsoft.com/office/drawing/2014/main" id="{B0737022-95D5-D417-4EFC-85589F6F9EA3}"/>
               </a:ext>
             </a:extLst>
           </p:cNvPr>
@@ -5216,7 +5266,7 @@
             <a:hlinkClick r:id="" action="ppaction://media"/>
             <a:extLst>
               <a:ext uri="{FF2B5EF4-FFF2-40B4-BE49-F238E27FC236}">
-                <a16:creationId xmlns:a16="http://schemas.microsoft.com/office/drawing/2014/main" id="{BD65FA5C-0235-C3C4-C723-AE20BBB7A929}"/>
+                <a16:creationId xmlns:a16="http://schemas.microsoft.com/office/drawing/2014/main" id="{E8A8BFCA-C41D-E633-18AC-96A69A195118}"/>
               </a:ext>
             </a:extLst>
           </p:cNvPr>
@@ -5251,7 +5301,7 @@
     </p:spTree>
     <p:extLst>
       <p:ext uri="{BB962C8B-B14F-4D97-AF65-F5344CB8AC3E}">
-        <p14:creationId xmlns:p14="http://schemas.microsoft.com/office/powerpoint/2010/main" val="1306395084"/>
+        <p14:creationId xmlns:p14="http://schemas.microsoft.com/office/powerpoint/2010/main" val="2484196444"/>
       </p:ext>
     </p:extLst>
   </p:cSld>
@@ -5375,7 +5425,7 @@
           <p:cNvPr id="2" name="テキスト ボックス 1">
             <a:extLst>
               <a:ext uri="{FF2B5EF4-FFF2-40B4-BE49-F238E27FC236}">
-                <a16:creationId xmlns:a16="http://schemas.microsoft.com/office/drawing/2014/main" id="{3B20CFB6-5AFD-D772-902E-B31619285502}"/>
+                <a16:creationId xmlns:a16="http://schemas.microsoft.com/office/drawing/2014/main" id="{42B7EEF3-3238-037D-6FD4-F5EAAA78D39A}"/>
               </a:ext>
             </a:extLst>
           </p:cNvPr>
@@ -5421,7 +5471,7 @@
           <p:cNvPr id="3" name="テキスト ボックス 2">
             <a:extLst>
               <a:ext uri="{FF2B5EF4-FFF2-40B4-BE49-F238E27FC236}">
-                <a16:creationId xmlns:a16="http://schemas.microsoft.com/office/drawing/2014/main" id="{A3FCB2E0-321D-202D-82D0-D4A29D7326DC}"/>
+                <a16:creationId xmlns:a16="http://schemas.microsoft.com/office/drawing/2014/main" id="{11EDEAAD-EE15-CCA3-11D1-DC767B876D11}"/>
               </a:ext>
             </a:extLst>
           </p:cNvPr>
@@ -5445,20 +5495,14 @@
           <a:lstStyle/>
           <a:p>
             <a:r>
-              <a:rPr kumimoji="1" lang="en-US" altLang="ja-JP" sz="3400" b="1">
+              <a:rPr kumimoji="1" lang="ja-JP" altLang="en-US" sz="3400" b="1">
                 <a:solidFill>
                   <a:srgbClr val="111111"/>
                 </a:solidFill>
                 <a:latin typeface="Arial" panose="020B0604020202020204" pitchFamily="34" charset="0"/>
               </a:rPr>
-              <a:t>READ THE FULL ARTICLE</a:t>
-            </a:r>
-            <a:endParaRPr kumimoji="1" lang="ja-JP" altLang="en-US" sz="3400" b="1">
-              <a:solidFill>
-                <a:srgbClr val="111111"/>
-              </a:solidFill>
-              <a:latin typeface="Arial" panose="020B0604020202020204" pitchFamily="34" charset="0"/>
-            </a:endParaRPr>
+              <a:t>詳しくは積み上げログへ</a:t>
+            </a:r>
           </a:p>
         </p:txBody>
       </p:sp>
@@ -5467,7 +5511,7 @@
           <p:cNvPr id="4" name="テキスト ボックス 3">
             <a:extLst>
               <a:ext uri="{FF2B5EF4-FFF2-40B4-BE49-F238E27FC236}">
-                <a16:creationId xmlns:a16="http://schemas.microsoft.com/office/drawing/2014/main" id="{72B950FE-109A-2A9A-EB26-1001F05C49D3}"/>
+                <a16:creationId xmlns:a16="http://schemas.microsoft.com/office/drawing/2014/main" id="{61244080-3CBF-74C2-FC87-BCFE6887237F}"/>
               </a:ext>
             </a:extLst>
           </p:cNvPr>
@@ -5491,14 +5535,32 @@
           <a:lstStyle/>
           <a:p>
             <a:r>
-              <a:rPr kumimoji="1" lang="sv-SE" altLang="ja-JP" sz="2000">
+              <a:rPr kumimoji="1" lang="zh-TW" altLang="en-US" sz="2000">
+                <a:solidFill>
+                  <a:srgbClr val="333333"/>
+                </a:solidFill>
+                <a:latin typeface="Arial" panose="020B0604020202020204" pitchFamily="34" charset="0"/>
+              </a:rPr>
+              <a:t>記事： </a:t>
+            </a:r>
+            <a:r>
+              <a:rPr kumimoji="1" lang="en-US" altLang="zh-TW" sz="2000">
                 <a:solidFill>
                   <a:srgbClr val="333333"/>
                 </a:solidFill>
                 <a:latin typeface="Arial" panose="020B0604020202020204" pitchFamily="34" charset="0"/>
               </a:rPr>
               <a:t>https://syunnjack.dev/articles/goal-pilot-app
-TSUMIAGE LOG</a:t>
+</a:t>
+            </a:r>
+            <a:r>
+              <a:rPr kumimoji="1" lang="zh-TW" altLang="en-US" sz="2000">
+                <a:solidFill>
+                  <a:srgbClr val="333333"/>
+                </a:solidFill>
+                <a:latin typeface="Arial" panose="020B0604020202020204" pitchFamily="34" charset="0"/>
+              </a:rPr>
+              <a:t>学び、作り、振り返る開発記録。</a:t>
             </a:r>
             <a:endParaRPr kumimoji="1" lang="ja-JP" altLang="en-US" sz="2000">
               <a:solidFill>
@@ -5514,7 +5576,7 @@
           <p:cNvPr id="5" name="テキスト ボックス 4">
             <a:extLst>
               <a:ext uri="{FF2B5EF4-FFF2-40B4-BE49-F238E27FC236}">
-                <a16:creationId xmlns:a16="http://schemas.microsoft.com/office/drawing/2014/main" id="{3A015D38-770D-DC50-0056-AE704220DE29}"/>
+                <a16:creationId xmlns:a16="http://schemas.microsoft.com/office/drawing/2014/main" id="{D2310959-AEB4-7742-ECF5-29A8F5102F7D}"/>
               </a:ext>
             </a:extLst>
           </p:cNvPr>
@@ -5561,7 +5623,7 @@
             <a:hlinkClick r:id="" action="ppaction://media"/>
             <a:extLst>
               <a:ext uri="{FF2B5EF4-FFF2-40B4-BE49-F238E27FC236}">
-                <a16:creationId xmlns:a16="http://schemas.microsoft.com/office/drawing/2014/main" id="{7C8DD524-B149-F6AC-3DA7-6DF1EB7A6789}"/>
+                <a16:creationId xmlns:a16="http://schemas.microsoft.com/office/drawing/2014/main" id="{F589DAA6-B861-F1D2-ABF6-774DDBA578E8}"/>
               </a:ext>
             </a:extLst>
           </p:cNvPr>
@@ -5596,7 +5658,7 @@
     </p:spTree>
     <p:extLst>
       <p:ext uri="{BB962C8B-B14F-4D97-AF65-F5344CB8AC3E}">
-        <p14:creationId xmlns:p14="http://schemas.microsoft.com/office/powerpoint/2010/main" val="1946572839"/>
+        <p14:creationId xmlns:p14="http://schemas.microsoft.com/office/powerpoint/2010/main" val="1982556700"/>
       </p:ext>
     </p:extLst>
   </p:cSld>

--- a/public/videos/repositories/goal-pilot-app/goal-pilot-app-tech-preview.pptx
+++ b/public/videos/repositories/goal-pilot-app/goal-pilot-app-tech-preview.pptx
@@ -134,7 +134,7 @@
           <p:cNvPr id="2" name="タイトル 1">
             <a:extLst>
               <a:ext uri="{FF2B5EF4-FFF2-40B4-BE49-F238E27FC236}">
-                <a16:creationId xmlns:a16="http://schemas.microsoft.com/office/drawing/2014/main" id="{3C78FE45-27FC-9934-566E-0B61B26A0D2F}"/>
+                <a16:creationId xmlns:a16="http://schemas.microsoft.com/office/drawing/2014/main" id="{C1C7592D-F3DA-ECD9-F082-FA3FFF02265A}"/>
               </a:ext>
             </a:extLst>
           </p:cNvPr>
@@ -171,7 +171,7 @@
           <p:cNvPr id="3" name="字幕 2">
             <a:extLst>
               <a:ext uri="{FF2B5EF4-FFF2-40B4-BE49-F238E27FC236}">
-                <a16:creationId xmlns:a16="http://schemas.microsoft.com/office/drawing/2014/main" id="{59C4FD52-49DA-23B6-E40B-15347FDA5275}"/>
+                <a16:creationId xmlns:a16="http://schemas.microsoft.com/office/drawing/2014/main" id="{70FA99CF-A7FB-BB01-7F44-3F6CCD56A2CA}"/>
               </a:ext>
             </a:extLst>
           </p:cNvPr>
@@ -241,7 +241,7 @@
           <p:cNvPr id="4" name="日付プレースホルダー 3">
             <a:extLst>
               <a:ext uri="{FF2B5EF4-FFF2-40B4-BE49-F238E27FC236}">
-                <a16:creationId xmlns:a16="http://schemas.microsoft.com/office/drawing/2014/main" id="{70DB73F1-7D21-D4AF-1C25-699C15B1C4D6}"/>
+                <a16:creationId xmlns:a16="http://schemas.microsoft.com/office/drawing/2014/main" id="{1C43B01F-5647-DABB-9FD8-B0A2740CD8C8}"/>
               </a:ext>
             </a:extLst>
           </p:cNvPr>
@@ -257,7 +257,7 @@
           <a:bodyPr/>
           <a:lstStyle/>
           <a:p>
-            <a:fld id="{D03F5CBC-68FC-41D2-8B0A-10598E32BEEB}" type="datetimeFigureOut">
+            <a:fld id="{59837547-4ED5-4DCB-88FB-D53B87E71581}" type="datetimeFigureOut">
               <a:rPr kumimoji="1" lang="ja-JP" altLang="en-US" smtClean="0"/>
               <a:t>2026/7/30</a:t>
             </a:fld>
@@ -270,7 +270,7 @@
           <p:cNvPr id="5" name="フッター プレースホルダー 4">
             <a:extLst>
               <a:ext uri="{FF2B5EF4-FFF2-40B4-BE49-F238E27FC236}">
-                <a16:creationId xmlns:a16="http://schemas.microsoft.com/office/drawing/2014/main" id="{73873359-8AAB-4F05-0C60-E62AF88318C0}"/>
+                <a16:creationId xmlns:a16="http://schemas.microsoft.com/office/drawing/2014/main" id="{35E4B304-504E-58E3-6E81-743B3D5AFD93}"/>
               </a:ext>
             </a:extLst>
           </p:cNvPr>
@@ -295,7 +295,7 @@
           <p:cNvPr id="6" name="スライド番号プレースホルダー 5">
             <a:extLst>
               <a:ext uri="{FF2B5EF4-FFF2-40B4-BE49-F238E27FC236}">
-                <a16:creationId xmlns:a16="http://schemas.microsoft.com/office/drawing/2014/main" id="{71CBE7A7-6E59-7E16-0CE2-DC1796A18A40}"/>
+                <a16:creationId xmlns:a16="http://schemas.microsoft.com/office/drawing/2014/main" id="{12F64F8E-8144-35D6-F3E8-D22E7E4559C0}"/>
               </a:ext>
             </a:extLst>
           </p:cNvPr>
@@ -311,7 +311,7 @@
           <a:bodyPr/>
           <a:lstStyle/>
           <a:p>
-            <a:fld id="{C2F1D243-1A93-4A8E-B147-14285FFC3BFF}" type="slidenum">
+            <a:fld id="{167C410E-EBC6-4D2C-8A67-7D710420BA75}" type="slidenum">
               <a:rPr kumimoji="1" lang="ja-JP" altLang="en-US" smtClean="0"/>
               <a:t>‹#›</a:t>
             </a:fld>
@@ -322,7 +322,7 @@
     </p:spTree>
     <p:extLst>
       <p:ext uri="{BB962C8B-B14F-4D97-AF65-F5344CB8AC3E}">
-        <p14:creationId xmlns:p14="http://schemas.microsoft.com/office/powerpoint/2010/main" val="2557854435"/>
+        <p14:creationId xmlns:p14="http://schemas.microsoft.com/office/powerpoint/2010/main" val="1915809421"/>
       </p:ext>
     </p:extLst>
   </p:cSld>
@@ -354,7 +354,7 @@
           <p:cNvPr id="2" name="タイトル 1">
             <a:extLst>
               <a:ext uri="{FF2B5EF4-FFF2-40B4-BE49-F238E27FC236}">
-                <a16:creationId xmlns:a16="http://schemas.microsoft.com/office/drawing/2014/main" id="{D02738F2-D5BA-9EB8-7327-CA94067451BE}"/>
+                <a16:creationId xmlns:a16="http://schemas.microsoft.com/office/drawing/2014/main" id="{DC73DD2A-57D4-0B52-6FAD-B9366D15B0C3}"/>
               </a:ext>
             </a:extLst>
           </p:cNvPr>
@@ -382,7 +382,7 @@
           <p:cNvPr id="3" name="縦書きテキスト プレースホルダー 2">
             <a:extLst>
               <a:ext uri="{FF2B5EF4-FFF2-40B4-BE49-F238E27FC236}">
-                <a16:creationId xmlns:a16="http://schemas.microsoft.com/office/drawing/2014/main" id="{CCE87E24-93BF-871C-F30B-C702EC10BB2E}"/>
+                <a16:creationId xmlns:a16="http://schemas.microsoft.com/office/drawing/2014/main" id="{068BBD1D-32D4-832A-4BF4-AF43AD82EDB0}"/>
               </a:ext>
             </a:extLst>
           </p:cNvPr>
@@ -471,7 +471,7 @@
           <p:cNvPr id="4" name="日付プレースホルダー 3">
             <a:extLst>
               <a:ext uri="{FF2B5EF4-FFF2-40B4-BE49-F238E27FC236}">
-                <a16:creationId xmlns:a16="http://schemas.microsoft.com/office/drawing/2014/main" id="{9D06AA51-8864-F02F-7151-1B60E70618ED}"/>
+                <a16:creationId xmlns:a16="http://schemas.microsoft.com/office/drawing/2014/main" id="{B1F7102E-4E39-885A-1F2F-CC57039ACCBB}"/>
               </a:ext>
             </a:extLst>
           </p:cNvPr>
@@ -487,7 +487,7 @@
           <a:bodyPr/>
           <a:lstStyle/>
           <a:p>
-            <a:fld id="{D03F5CBC-68FC-41D2-8B0A-10598E32BEEB}" type="datetimeFigureOut">
+            <a:fld id="{59837547-4ED5-4DCB-88FB-D53B87E71581}" type="datetimeFigureOut">
               <a:rPr kumimoji="1" lang="ja-JP" altLang="en-US" smtClean="0"/>
               <a:t>2026/7/30</a:t>
             </a:fld>
@@ -500,7 +500,7 @@
           <p:cNvPr id="5" name="フッター プレースホルダー 4">
             <a:extLst>
               <a:ext uri="{FF2B5EF4-FFF2-40B4-BE49-F238E27FC236}">
-                <a16:creationId xmlns:a16="http://schemas.microsoft.com/office/drawing/2014/main" id="{C1EEBCB5-FB8E-2CE9-4F70-D26200F5571A}"/>
+                <a16:creationId xmlns:a16="http://schemas.microsoft.com/office/drawing/2014/main" id="{6B507E8A-2653-CA4F-F302-6752A930CDBF}"/>
               </a:ext>
             </a:extLst>
           </p:cNvPr>
@@ -525,7 +525,7 @@
           <p:cNvPr id="6" name="スライド番号プレースホルダー 5">
             <a:extLst>
               <a:ext uri="{FF2B5EF4-FFF2-40B4-BE49-F238E27FC236}">
-                <a16:creationId xmlns:a16="http://schemas.microsoft.com/office/drawing/2014/main" id="{8D6F4067-B8E4-BAA2-8C8A-9E59FAE60988}"/>
+                <a16:creationId xmlns:a16="http://schemas.microsoft.com/office/drawing/2014/main" id="{BF94E8C4-6E65-4613-B9D3-17CCB1C1DE97}"/>
               </a:ext>
             </a:extLst>
           </p:cNvPr>
@@ -541,7 +541,7 @@
           <a:bodyPr/>
           <a:lstStyle/>
           <a:p>
-            <a:fld id="{C2F1D243-1A93-4A8E-B147-14285FFC3BFF}" type="slidenum">
+            <a:fld id="{167C410E-EBC6-4D2C-8A67-7D710420BA75}" type="slidenum">
               <a:rPr kumimoji="1" lang="ja-JP" altLang="en-US" smtClean="0"/>
               <a:t>‹#›</a:t>
             </a:fld>
@@ -552,7 +552,7 @@
     </p:spTree>
     <p:extLst>
       <p:ext uri="{BB962C8B-B14F-4D97-AF65-F5344CB8AC3E}">
-        <p14:creationId xmlns:p14="http://schemas.microsoft.com/office/powerpoint/2010/main" val="3948252111"/>
+        <p14:creationId xmlns:p14="http://schemas.microsoft.com/office/powerpoint/2010/main" val="3810894357"/>
       </p:ext>
     </p:extLst>
   </p:cSld>
@@ -584,7 +584,7 @@
           <p:cNvPr id="2" name="縦書きタイトル 1">
             <a:extLst>
               <a:ext uri="{FF2B5EF4-FFF2-40B4-BE49-F238E27FC236}">
-                <a16:creationId xmlns:a16="http://schemas.microsoft.com/office/drawing/2014/main" id="{59B5735E-C11F-99A1-7997-AE7ACE9A9DFC}"/>
+                <a16:creationId xmlns:a16="http://schemas.microsoft.com/office/drawing/2014/main" id="{8E4ECF31-9727-A883-C94C-8125A435AA5D}"/>
               </a:ext>
             </a:extLst>
           </p:cNvPr>
@@ -617,7 +617,7 @@
           <p:cNvPr id="3" name="縦書きテキスト プレースホルダー 2">
             <a:extLst>
               <a:ext uri="{FF2B5EF4-FFF2-40B4-BE49-F238E27FC236}">
-                <a16:creationId xmlns:a16="http://schemas.microsoft.com/office/drawing/2014/main" id="{0B01CA80-38FB-8E8A-FFB7-AF50EF7CC50B}"/>
+                <a16:creationId xmlns:a16="http://schemas.microsoft.com/office/drawing/2014/main" id="{C597FBF6-401A-CCCF-EFB0-56CC9F9AB545}"/>
               </a:ext>
             </a:extLst>
           </p:cNvPr>
@@ -711,7 +711,7 @@
           <p:cNvPr id="4" name="日付プレースホルダー 3">
             <a:extLst>
               <a:ext uri="{FF2B5EF4-FFF2-40B4-BE49-F238E27FC236}">
-                <a16:creationId xmlns:a16="http://schemas.microsoft.com/office/drawing/2014/main" id="{98859382-8A95-C80B-638E-6166D35E78AB}"/>
+                <a16:creationId xmlns:a16="http://schemas.microsoft.com/office/drawing/2014/main" id="{8A7653F2-C5F0-B9CC-B0EC-3ABA9792DE9D}"/>
               </a:ext>
             </a:extLst>
           </p:cNvPr>
@@ -727,7 +727,7 @@
           <a:bodyPr/>
           <a:lstStyle/>
           <a:p>
-            <a:fld id="{D03F5CBC-68FC-41D2-8B0A-10598E32BEEB}" type="datetimeFigureOut">
+            <a:fld id="{59837547-4ED5-4DCB-88FB-D53B87E71581}" type="datetimeFigureOut">
               <a:rPr kumimoji="1" lang="ja-JP" altLang="en-US" smtClean="0"/>
               <a:t>2026/7/30</a:t>
             </a:fld>
@@ -740,7 +740,7 @@
           <p:cNvPr id="5" name="フッター プレースホルダー 4">
             <a:extLst>
               <a:ext uri="{FF2B5EF4-FFF2-40B4-BE49-F238E27FC236}">
-                <a16:creationId xmlns:a16="http://schemas.microsoft.com/office/drawing/2014/main" id="{3448E2AC-6630-8182-3877-CF612A71BB1E}"/>
+                <a16:creationId xmlns:a16="http://schemas.microsoft.com/office/drawing/2014/main" id="{EF0812C2-4DBB-90EA-4A0A-499A4CFCD8B8}"/>
               </a:ext>
             </a:extLst>
           </p:cNvPr>
@@ -765,7 +765,7 @@
           <p:cNvPr id="6" name="スライド番号プレースホルダー 5">
             <a:extLst>
               <a:ext uri="{FF2B5EF4-FFF2-40B4-BE49-F238E27FC236}">
-                <a16:creationId xmlns:a16="http://schemas.microsoft.com/office/drawing/2014/main" id="{51FAB372-5C8F-053C-B100-BFAFE6BC1E2A}"/>
+                <a16:creationId xmlns:a16="http://schemas.microsoft.com/office/drawing/2014/main" id="{424EE764-428F-B40C-EC69-2DE95B4B8091}"/>
               </a:ext>
             </a:extLst>
           </p:cNvPr>
@@ -781,7 +781,7 @@
           <a:bodyPr/>
           <a:lstStyle/>
           <a:p>
-            <a:fld id="{C2F1D243-1A93-4A8E-B147-14285FFC3BFF}" type="slidenum">
+            <a:fld id="{167C410E-EBC6-4D2C-8A67-7D710420BA75}" type="slidenum">
               <a:rPr kumimoji="1" lang="ja-JP" altLang="en-US" smtClean="0"/>
               <a:t>‹#›</a:t>
             </a:fld>
@@ -792,7 +792,7 @@
     </p:spTree>
     <p:extLst>
       <p:ext uri="{BB962C8B-B14F-4D97-AF65-F5344CB8AC3E}">
-        <p14:creationId xmlns:p14="http://schemas.microsoft.com/office/powerpoint/2010/main" val="4040345162"/>
+        <p14:creationId xmlns:p14="http://schemas.microsoft.com/office/powerpoint/2010/main" val="1320936266"/>
       </p:ext>
     </p:extLst>
   </p:cSld>
@@ -824,7 +824,7 @@
           <p:cNvPr id="2" name="タイトル 1">
             <a:extLst>
               <a:ext uri="{FF2B5EF4-FFF2-40B4-BE49-F238E27FC236}">
-                <a16:creationId xmlns:a16="http://schemas.microsoft.com/office/drawing/2014/main" id="{CFF499CC-9D03-45F3-4141-BB7D6DDAB7FE}"/>
+                <a16:creationId xmlns:a16="http://schemas.microsoft.com/office/drawing/2014/main" id="{BBE3B961-1FC1-CAE9-549D-243D85CB1C98}"/>
               </a:ext>
             </a:extLst>
           </p:cNvPr>
@@ -852,7 +852,7 @@
           <p:cNvPr id="3" name="コンテンツ プレースホルダー 2">
             <a:extLst>
               <a:ext uri="{FF2B5EF4-FFF2-40B4-BE49-F238E27FC236}">
-                <a16:creationId xmlns:a16="http://schemas.microsoft.com/office/drawing/2014/main" id="{E3D75EFC-DBCA-2CCB-F751-1E91F5043CAE}"/>
+                <a16:creationId xmlns:a16="http://schemas.microsoft.com/office/drawing/2014/main" id="{35B1121C-8BDC-4C57-CFE1-902EA33A7F22}"/>
               </a:ext>
             </a:extLst>
           </p:cNvPr>
@@ -941,7 +941,7 @@
           <p:cNvPr id="4" name="日付プレースホルダー 3">
             <a:extLst>
               <a:ext uri="{FF2B5EF4-FFF2-40B4-BE49-F238E27FC236}">
-                <a16:creationId xmlns:a16="http://schemas.microsoft.com/office/drawing/2014/main" id="{F445F7E9-DB88-6FC2-37D7-37AC4905445A}"/>
+                <a16:creationId xmlns:a16="http://schemas.microsoft.com/office/drawing/2014/main" id="{09B01A96-3501-4AD0-D559-012DE3FDFA85}"/>
               </a:ext>
             </a:extLst>
           </p:cNvPr>
@@ -957,7 +957,7 @@
           <a:bodyPr/>
           <a:lstStyle/>
           <a:p>
-            <a:fld id="{D03F5CBC-68FC-41D2-8B0A-10598E32BEEB}" type="datetimeFigureOut">
+            <a:fld id="{59837547-4ED5-4DCB-88FB-D53B87E71581}" type="datetimeFigureOut">
               <a:rPr kumimoji="1" lang="ja-JP" altLang="en-US" smtClean="0"/>
               <a:t>2026/7/30</a:t>
             </a:fld>
@@ -970,7 +970,7 @@
           <p:cNvPr id="5" name="フッター プレースホルダー 4">
             <a:extLst>
               <a:ext uri="{FF2B5EF4-FFF2-40B4-BE49-F238E27FC236}">
-                <a16:creationId xmlns:a16="http://schemas.microsoft.com/office/drawing/2014/main" id="{013DE1A8-8012-D01F-88A2-7925753414C6}"/>
+                <a16:creationId xmlns:a16="http://schemas.microsoft.com/office/drawing/2014/main" id="{7E7E693C-430F-3658-F108-C12B425D9640}"/>
               </a:ext>
             </a:extLst>
           </p:cNvPr>
@@ -995,7 +995,7 @@
           <p:cNvPr id="6" name="スライド番号プレースホルダー 5">
             <a:extLst>
               <a:ext uri="{FF2B5EF4-FFF2-40B4-BE49-F238E27FC236}">
-                <a16:creationId xmlns:a16="http://schemas.microsoft.com/office/drawing/2014/main" id="{76B13CCF-DF4D-8CC3-215A-60A8B9717A92}"/>
+                <a16:creationId xmlns:a16="http://schemas.microsoft.com/office/drawing/2014/main" id="{2CBD4BC3-3796-42F9-1531-89789D8E43D7}"/>
               </a:ext>
             </a:extLst>
           </p:cNvPr>
@@ -1011,7 +1011,7 @@
           <a:bodyPr/>
           <a:lstStyle/>
           <a:p>
-            <a:fld id="{C2F1D243-1A93-4A8E-B147-14285FFC3BFF}" type="slidenum">
+            <a:fld id="{167C410E-EBC6-4D2C-8A67-7D710420BA75}" type="slidenum">
               <a:rPr kumimoji="1" lang="ja-JP" altLang="en-US" smtClean="0"/>
               <a:t>‹#›</a:t>
             </a:fld>
@@ -1022,7 +1022,7 @@
     </p:spTree>
     <p:extLst>
       <p:ext uri="{BB962C8B-B14F-4D97-AF65-F5344CB8AC3E}">
-        <p14:creationId xmlns:p14="http://schemas.microsoft.com/office/powerpoint/2010/main" val="6145751"/>
+        <p14:creationId xmlns:p14="http://schemas.microsoft.com/office/powerpoint/2010/main" val="3412851551"/>
       </p:ext>
     </p:extLst>
   </p:cSld>
@@ -1054,7 +1054,7 @@
           <p:cNvPr id="2" name="タイトル 1">
             <a:extLst>
               <a:ext uri="{FF2B5EF4-FFF2-40B4-BE49-F238E27FC236}">
-                <a16:creationId xmlns:a16="http://schemas.microsoft.com/office/drawing/2014/main" id="{7EBCC479-4AF0-4338-804E-B8114EA1206F}"/>
+                <a16:creationId xmlns:a16="http://schemas.microsoft.com/office/drawing/2014/main" id="{E55F6C7C-E17D-E159-C06B-F0DA5E220DC4}"/>
               </a:ext>
             </a:extLst>
           </p:cNvPr>
@@ -1091,7 +1091,7 @@
           <p:cNvPr id="3" name="テキスト プレースホルダー 2">
             <a:extLst>
               <a:ext uri="{FF2B5EF4-FFF2-40B4-BE49-F238E27FC236}">
-                <a16:creationId xmlns:a16="http://schemas.microsoft.com/office/drawing/2014/main" id="{6CB1AD3A-D203-DE29-BBEE-5D284C99F8C5}"/>
+                <a16:creationId xmlns:a16="http://schemas.microsoft.com/office/drawing/2014/main" id="{A4A4CDD0-8E8B-E42D-DAA5-79C7914B0628}"/>
               </a:ext>
             </a:extLst>
           </p:cNvPr>
@@ -1216,7 +1216,7 @@
           <p:cNvPr id="4" name="日付プレースホルダー 3">
             <a:extLst>
               <a:ext uri="{FF2B5EF4-FFF2-40B4-BE49-F238E27FC236}">
-                <a16:creationId xmlns:a16="http://schemas.microsoft.com/office/drawing/2014/main" id="{43C51C9C-DA32-CFDC-2C31-952FFA93B712}"/>
+                <a16:creationId xmlns:a16="http://schemas.microsoft.com/office/drawing/2014/main" id="{52D011E3-69A0-B15F-02A0-AB6060C0F39F}"/>
               </a:ext>
             </a:extLst>
           </p:cNvPr>
@@ -1232,7 +1232,7 @@
           <a:bodyPr/>
           <a:lstStyle/>
           <a:p>
-            <a:fld id="{D03F5CBC-68FC-41D2-8B0A-10598E32BEEB}" type="datetimeFigureOut">
+            <a:fld id="{59837547-4ED5-4DCB-88FB-D53B87E71581}" type="datetimeFigureOut">
               <a:rPr kumimoji="1" lang="ja-JP" altLang="en-US" smtClean="0"/>
               <a:t>2026/7/30</a:t>
             </a:fld>
@@ -1245,7 +1245,7 @@
           <p:cNvPr id="5" name="フッター プレースホルダー 4">
             <a:extLst>
               <a:ext uri="{FF2B5EF4-FFF2-40B4-BE49-F238E27FC236}">
-                <a16:creationId xmlns:a16="http://schemas.microsoft.com/office/drawing/2014/main" id="{C905E55A-6213-1721-5B0E-41C24BCDB93B}"/>
+                <a16:creationId xmlns:a16="http://schemas.microsoft.com/office/drawing/2014/main" id="{8EE4AA01-6012-0EBD-73D6-7B09174F6722}"/>
               </a:ext>
             </a:extLst>
           </p:cNvPr>
@@ -1270,7 +1270,7 @@
           <p:cNvPr id="6" name="スライド番号プレースホルダー 5">
             <a:extLst>
               <a:ext uri="{FF2B5EF4-FFF2-40B4-BE49-F238E27FC236}">
-                <a16:creationId xmlns:a16="http://schemas.microsoft.com/office/drawing/2014/main" id="{40E639B6-59A5-74DD-A53B-FDBA40C22C9D}"/>
+                <a16:creationId xmlns:a16="http://schemas.microsoft.com/office/drawing/2014/main" id="{CD860208-AEAE-6480-32CD-F39A2A680412}"/>
               </a:ext>
             </a:extLst>
           </p:cNvPr>
@@ -1286,7 +1286,7 @@
           <a:bodyPr/>
           <a:lstStyle/>
           <a:p>
-            <a:fld id="{C2F1D243-1A93-4A8E-B147-14285FFC3BFF}" type="slidenum">
+            <a:fld id="{167C410E-EBC6-4D2C-8A67-7D710420BA75}" type="slidenum">
               <a:rPr kumimoji="1" lang="ja-JP" altLang="en-US" smtClean="0"/>
               <a:t>‹#›</a:t>
             </a:fld>
@@ -1297,7 +1297,7 @@
     </p:spTree>
     <p:extLst>
       <p:ext uri="{BB962C8B-B14F-4D97-AF65-F5344CB8AC3E}">
-        <p14:creationId xmlns:p14="http://schemas.microsoft.com/office/powerpoint/2010/main" val="719895994"/>
+        <p14:creationId xmlns:p14="http://schemas.microsoft.com/office/powerpoint/2010/main" val="4246960809"/>
       </p:ext>
     </p:extLst>
   </p:cSld>
@@ -1329,7 +1329,7 @@
           <p:cNvPr id="2" name="タイトル 1">
             <a:extLst>
               <a:ext uri="{FF2B5EF4-FFF2-40B4-BE49-F238E27FC236}">
-                <a16:creationId xmlns:a16="http://schemas.microsoft.com/office/drawing/2014/main" id="{E022211D-A569-9FF0-BA3E-6BBACD8BF670}"/>
+                <a16:creationId xmlns:a16="http://schemas.microsoft.com/office/drawing/2014/main" id="{A8958E61-C177-17D5-7E55-47E9F3E484EC}"/>
               </a:ext>
             </a:extLst>
           </p:cNvPr>
@@ -1357,7 +1357,7 @@
           <p:cNvPr id="3" name="コンテンツ プレースホルダー 2">
             <a:extLst>
               <a:ext uri="{FF2B5EF4-FFF2-40B4-BE49-F238E27FC236}">
-                <a16:creationId xmlns:a16="http://schemas.microsoft.com/office/drawing/2014/main" id="{433BEA35-BB79-1B35-2CC0-2BADF4A5FEAC}"/>
+                <a16:creationId xmlns:a16="http://schemas.microsoft.com/office/drawing/2014/main" id="{AE54962B-3A8C-92C5-28AC-919FB9C10E3E}"/>
               </a:ext>
             </a:extLst>
           </p:cNvPr>
@@ -1451,7 +1451,7 @@
           <p:cNvPr id="4" name="コンテンツ プレースホルダー 3">
             <a:extLst>
               <a:ext uri="{FF2B5EF4-FFF2-40B4-BE49-F238E27FC236}">
-                <a16:creationId xmlns:a16="http://schemas.microsoft.com/office/drawing/2014/main" id="{29C812F5-A00B-1940-6BDB-1CD9468972BE}"/>
+                <a16:creationId xmlns:a16="http://schemas.microsoft.com/office/drawing/2014/main" id="{FBBF75E6-51E0-3BB9-4A6A-8ABF399BA589}"/>
               </a:ext>
             </a:extLst>
           </p:cNvPr>
@@ -1545,7 +1545,7 @@
           <p:cNvPr id="5" name="日付プレースホルダー 4">
             <a:extLst>
               <a:ext uri="{FF2B5EF4-FFF2-40B4-BE49-F238E27FC236}">
-                <a16:creationId xmlns:a16="http://schemas.microsoft.com/office/drawing/2014/main" id="{C7BA2C04-4E3F-7BF5-0B6D-F4FE00BCDDD7}"/>
+                <a16:creationId xmlns:a16="http://schemas.microsoft.com/office/drawing/2014/main" id="{C7A0407F-FE43-0C00-C331-A9ECCB013C3E}"/>
               </a:ext>
             </a:extLst>
           </p:cNvPr>
@@ -1561,7 +1561,7 @@
           <a:bodyPr/>
           <a:lstStyle/>
           <a:p>
-            <a:fld id="{D03F5CBC-68FC-41D2-8B0A-10598E32BEEB}" type="datetimeFigureOut">
+            <a:fld id="{59837547-4ED5-4DCB-88FB-D53B87E71581}" type="datetimeFigureOut">
               <a:rPr kumimoji="1" lang="ja-JP" altLang="en-US" smtClean="0"/>
               <a:t>2026/7/30</a:t>
             </a:fld>
@@ -1574,7 +1574,7 @@
           <p:cNvPr id="6" name="フッター プレースホルダー 5">
             <a:extLst>
               <a:ext uri="{FF2B5EF4-FFF2-40B4-BE49-F238E27FC236}">
-                <a16:creationId xmlns:a16="http://schemas.microsoft.com/office/drawing/2014/main" id="{127D6E20-FF87-2C22-6C5F-EBBECE7D776A}"/>
+                <a16:creationId xmlns:a16="http://schemas.microsoft.com/office/drawing/2014/main" id="{EF25820C-3F25-F36E-1C4E-C5044138AFB5}"/>
               </a:ext>
             </a:extLst>
           </p:cNvPr>
@@ -1599,7 +1599,7 @@
           <p:cNvPr id="7" name="スライド番号プレースホルダー 6">
             <a:extLst>
               <a:ext uri="{FF2B5EF4-FFF2-40B4-BE49-F238E27FC236}">
-                <a16:creationId xmlns:a16="http://schemas.microsoft.com/office/drawing/2014/main" id="{0F01074E-1767-2694-E43D-E9CA97CEA130}"/>
+                <a16:creationId xmlns:a16="http://schemas.microsoft.com/office/drawing/2014/main" id="{AC35D3A1-F477-BEC7-CA79-006A3C9E7F8C}"/>
               </a:ext>
             </a:extLst>
           </p:cNvPr>
@@ -1615,7 +1615,7 @@
           <a:bodyPr/>
           <a:lstStyle/>
           <a:p>
-            <a:fld id="{C2F1D243-1A93-4A8E-B147-14285FFC3BFF}" type="slidenum">
+            <a:fld id="{167C410E-EBC6-4D2C-8A67-7D710420BA75}" type="slidenum">
               <a:rPr kumimoji="1" lang="ja-JP" altLang="en-US" smtClean="0"/>
               <a:t>‹#›</a:t>
             </a:fld>
@@ -1626,7 +1626,7 @@
     </p:spTree>
     <p:extLst>
       <p:ext uri="{BB962C8B-B14F-4D97-AF65-F5344CB8AC3E}">
-        <p14:creationId xmlns:p14="http://schemas.microsoft.com/office/powerpoint/2010/main" val="3966275712"/>
+        <p14:creationId xmlns:p14="http://schemas.microsoft.com/office/powerpoint/2010/main" val="2467802160"/>
       </p:ext>
     </p:extLst>
   </p:cSld>
@@ -1658,7 +1658,7 @@
           <p:cNvPr id="2" name="タイトル 1">
             <a:extLst>
               <a:ext uri="{FF2B5EF4-FFF2-40B4-BE49-F238E27FC236}">
-                <a16:creationId xmlns:a16="http://schemas.microsoft.com/office/drawing/2014/main" id="{408E77E9-24BF-3C04-AD03-79848018E1F8}"/>
+                <a16:creationId xmlns:a16="http://schemas.microsoft.com/office/drawing/2014/main" id="{8EE254EF-9904-AD93-CE2E-C2F762F32B66}"/>
               </a:ext>
             </a:extLst>
           </p:cNvPr>
@@ -1691,7 +1691,7 @@
           <p:cNvPr id="3" name="テキスト プレースホルダー 2">
             <a:extLst>
               <a:ext uri="{FF2B5EF4-FFF2-40B4-BE49-F238E27FC236}">
-                <a16:creationId xmlns:a16="http://schemas.microsoft.com/office/drawing/2014/main" id="{E2A2ECAF-5A31-B2AC-87AA-F458945A92C8}"/>
+                <a16:creationId xmlns:a16="http://schemas.microsoft.com/office/drawing/2014/main" id="{D5B2BEB1-6927-583D-8111-FC736F45592A}"/>
               </a:ext>
             </a:extLst>
           </p:cNvPr>
@@ -1762,7 +1762,7 @@
           <p:cNvPr id="4" name="コンテンツ プレースホルダー 3">
             <a:extLst>
               <a:ext uri="{FF2B5EF4-FFF2-40B4-BE49-F238E27FC236}">
-                <a16:creationId xmlns:a16="http://schemas.microsoft.com/office/drawing/2014/main" id="{9D7E98DA-E020-36D7-5923-5343A9C5B9DA}"/>
+                <a16:creationId xmlns:a16="http://schemas.microsoft.com/office/drawing/2014/main" id="{C4E35A0A-416D-08A0-350B-ECD7906DC8A3}"/>
               </a:ext>
             </a:extLst>
           </p:cNvPr>
@@ -1856,7 +1856,7 @@
           <p:cNvPr id="5" name="テキスト プレースホルダー 4">
             <a:extLst>
               <a:ext uri="{FF2B5EF4-FFF2-40B4-BE49-F238E27FC236}">
-                <a16:creationId xmlns:a16="http://schemas.microsoft.com/office/drawing/2014/main" id="{8B84F2C6-444A-ABE6-BDE9-F4794994F66D}"/>
+                <a16:creationId xmlns:a16="http://schemas.microsoft.com/office/drawing/2014/main" id="{19DD1B7A-6D8B-D6FC-ECAB-8905DB127C63}"/>
               </a:ext>
             </a:extLst>
           </p:cNvPr>
@@ -1927,7 +1927,7 @@
           <p:cNvPr id="6" name="コンテンツ プレースホルダー 5">
             <a:extLst>
               <a:ext uri="{FF2B5EF4-FFF2-40B4-BE49-F238E27FC236}">
-                <a16:creationId xmlns:a16="http://schemas.microsoft.com/office/drawing/2014/main" id="{C20C9EEC-5E74-089E-A302-6EB6BADB4A10}"/>
+                <a16:creationId xmlns:a16="http://schemas.microsoft.com/office/drawing/2014/main" id="{0E7918A6-6D4D-8F94-DA39-F59DD8EB8E37}"/>
               </a:ext>
             </a:extLst>
           </p:cNvPr>
@@ -2021,7 +2021,7 @@
           <p:cNvPr id="7" name="日付プレースホルダー 6">
             <a:extLst>
               <a:ext uri="{FF2B5EF4-FFF2-40B4-BE49-F238E27FC236}">
-                <a16:creationId xmlns:a16="http://schemas.microsoft.com/office/drawing/2014/main" id="{72268F9B-E1FE-B7C4-4DB6-3E978210C274}"/>
+                <a16:creationId xmlns:a16="http://schemas.microsoft.com/office/drawing/2014/main" id="{E815214D-990B-DAB2-69DF-AD4939F90EE5}"/>
               </a:ext>
             </a:extLst>
           </p:cNvPr>
@@ -2037,7 +2037,7 @@
           <a:bodyPr/>
           <a:lstStyle/>
           <a:p>
-            <a:fld id="{D03F5CBC-68FC-41D2-8B0A-10598E32BEEB}" type="datetimeFigureOut">
+            <a:fld id="{59837547-4ED5-4DCB-88FB-D53B87E71581}" type="datetimeFigureOut">
               <a:rPr kumimoji="1" lang="ja-JP" altLang="en-US" smtClean="0"/>
               <a:t>2026/7/30</a:t>
             </a:fld>
@@ -2050,7 +2050,7 @@
           <p:cNvPr id="8" name="フッター プレースホルダー 7">
             <a:extLst>
               <a:ext uri="{FF2B5EF4-FFF2-40B4-BE49-F238E27FC236}">
-                <a16:creationId xmlns:a16="http://schemas.microsoft.com/office/drawing/2014/main" id="{B5B5A1B6-A391-081B-8D5B-64B14BB63B25}"/>
+                <a16:creationId xmlns:a16="http://schemas.microsoft.com/office/drawing/2014/main" id="{4591B80F-A516-EF81-9A0D-BF49668924FF}"/>
               </a:ext>
             </a:extLst>
           </p:cNvPr>
@@ -2075,7 +2075,7 @@
           <p:cNvPr id="9" name="スライド番号プレースホルダー 8">
             <a:extLst>
               <a:ext uri="{FF2B5EF4-FFF2-40B4-BE49-F238E27FC236}">
-                <a16:creationId xmlns:a16="http://schemas.microsoft.com/office/drawing/2014/main" id="{BE743B28-4BE9-4D14-29F0-6537F1925FAA}"/>
+                <a16:creationId xmlns:a16="http://schemas.microsoft.com/office/drawing/2014/main" id="{E8B63AF0-782C-D01E-E040-FB5407C464AE}"/>
               </a:ext>
             </a:extLst>
           </p:cNvPr>
@@ -2091,7 +2091,7 @@
           <a:bodyPr/>
           <a:lstStyle/>
           <a:p>
-            <a:fld id="{C2F1D243-1A93-4A8E-B147-14285FFC3BFF}" type="slidenum">
+            <a:fld id="{167C410E-EBC6-4D2C-8A67-7D710420BA75}" type="slidenum">
               <a:rPr kumimoji="1" lang="ja-JP" altLang="en-US" smtClean="0"/>
               <a:t>‹#›</a:t>
             </a:fld>
@@ -2102,7 +2102,7 @@
     </p:spTree>
     <p:extLst>
       <p:ext uri="{BB962C8B-B14F-4D97-AF65-F5344CB8AC3E}">
-        <p14:creationId xmlns:p14="http://schemas.microsoft.com/office/powerpoint/2010/main" val="3159746880"/>
+        <p14:creationId xmlns:p14="http://schemas.microsoft.com/office/powerpoint/2010/main" val="1498128393"/>
       </p:ext>
     </p:extLst>
   </p:cSld>
@@ -2134,7 +2134,7 @@
           <p:cNvPr id="2" name="タイトル 1">
             <a:extLst>
               <a:ext uri="{FF2B5EF4-FFF2-40B4-BE49-F238E27FC236}">
-                <a16:creationId xmlns:a16="http://schemas.microsoft.com/office/drawing/2014/main" id="{83F4539B-B25B-E699-DA49-4199B9A6F5FC}"/>
+                <a16:creationId xmlns:a16="http://schemas.microsoft.com/office/drawing/2014/main" id="{8539AE2E-A871-7A73-34E7-D5631231B8C9}"/>
               </a:ext>
             </a:extLst>
           </p:cNvPr>
@@ -2162,7 +2162,7 @@
           <p:cNvPr id="3" name="日付プレースホルダー 2">
             <a:extLst>
               <a:ext uri="{FF2B5EF4-FFF2-40B4-BE49-F238E27FC236}">
-                <a16:creationId xmlns:a16="http://schemas.microsoft.com/office/drawing/2014/main" id="{9F71D639-38A8-4E13-E2E7-B7E780EE80CA}"/>
+                <a16:creationId xmlns:a16="http://schemas.microsoft.com/office/drawing/2014/main" id="{F78C5E27-D0D1-049C-22A8-EC05A0C919CF}"/>
               </a:ext>
             </a:extLst>
           </p:cNvPr>
@@ -2178,7 +2178,7 @@
           <a:bodyPr/>
           <a:lstStyle/>
           <a:p>
-            <a:fld id="{D03F5CBC-68FC-41D2-8B0A-10598E32BEEB}" type="datetimeFigureOut">
+            <a:fld id="{59837547-4ED5-4DCB-88FB-D53B87E71581}" type="datetimeFigureOut">
               <a:rPr kumimoji="1" lang="ja-JP" altLang="en-US" smtClean="0"/>
               <a:t>2026/7/30</a:t>
             </a:fld>
@@ -2191,7 +2191,7 @@
           <p:cNvPr id="4" name="フッター プレースホルダー 3">
             <a:extLst>
               <a:ext uri="{FF2B5EF4-FFF2-40B4-BE49-F238E27FC236}">
-                <a16:creationId xmlns:a16="http://schemas.microsoft.com/office/drawing/2014/main" id="{074ABF21-8216-8468-F462-09E4E5110E56}"/>
+                <a16:creationId xmlns:a16="http://schemas.microsoft.com/office/drawing/2014/main" id="{B62F809A-2BD6-935E-BFDE-09F7D3D51DB7}"/>
               </a:ext>
             </a:extLst>
           </p:cNvPr>
@@ -2216,7 +2216,7 @@
           <p:cNvPr id="5" name="スライド番号プレースホルダー 4">
             <a:extLst>
               <a:ext uri="{FF2B5EF4-FFF2-40B4-BE49-F238E27FC236}">
-                <a16:creationId xmlns:a16="http://schemas.microsoft.com/office/drawing/2014/main" id="{A8C41F66-6DEC-DFC1-B86A-107CA8AB3403}"/>
+                <a16:creationId xmlns:a16="http://schemas.microsoft.com/office/drawing/2014/main" id="{035AE17C-1E53-BEF2-7FF2-F3C10DEB2047}"/>
               </a:ext>
             </a:extLst>
           </p:cNvPr>
@@ -2232,7 +2232,7 @@
           <a:bodyPr/>
           <a:lstStyle/>
           <a:p>
-            <a:fld id="{C2F1D243-1A93-4A8E-B147-14285FFC3BFF}" type="slidenum">
+            <a:fld id="{167C410E-EBC6-4D2C-8A67-7D710420BA75}" type="slidenum">
               <a:rPr kumimoji="1" lang="ja-JP" altLang="en-US" smtClean="0"/>
               <a:t>‹#›</a:t>
             </a:fld>
@@ -2243,7 +2243,7 @@
     </p:spTree>
     <p:extLst>
       <p:ext uri="{BB962C8B-B14F-4D97-AF65-F5344CB8AC3E}">
-        <p14:creationId xmlns:p14="http://schemas.microsoft.com/office/powerpoint/2010/main" val="367833363"/>
+        <p14:creationId xmlns:p14="http://schemas.microsoft.com/office/powerpoint/2010/main" val="1076010556"/>
       </p:ext>
     </p:extLst>
   </p:cSld>
@@ -2275,7 +2275,7 @@
           <p:cNvPr id="2" name="日付プレースホルダー 1">
             <a:extLst>
               <a:ext uri="{FF2B5EF4-FFF2-40B4-BE49-F238E27FC236}">
-                <a16:creationId xmlns:a16="http://schemas.microsoft.com/office/drawing/2014/main" id="{28877416-58A7-E8EF-9282-8D079FB74444}"/>
+                <a16:creationId xmlns:a16="http://schemas.microsoft.com/office/drawing/2014/main" id="{2AE20A30-01BC-E8AF-79F6-CE0C1ABE77D0}"/>
               </a:ext>
             </a:extLst>
           </p:cNvPr>
@@ -2291,7 +2291,7 @@
           <a:bodyPr/>
           <a:lstStyle/>
           <a:p>
-            <a:fld id="{D03F5CBC-68FC-41D2-8B0A-10598E32BEEB}" type="datetimeFigureOut">
+            <a:fld id="{59837547-4ED5-4DCB-88FB-D53B87E71581}" type="datetimeFigureOut">
               <a:rPr kumimoji="1" lang="ja-JP" altLang="en-US" smtClean="0"/>
               <a:t>2026/7/30</a:t>
             </a:fld>
@@ -2304,7 +2304,7 @@
           <p:cNvPr id="3" name="フッター プレースホルダー 2">
             <a:extLst>
               <a:ext uri="{FF2B5EF4-FFF2-40B4-BE49-F238E27FC236}">
-                <a16:creationId xmlns:a16="http://schemas.microsoft.com/office/drawing/2014/main" id="{B172922F-5207-582B-CF55-940CB823B20A}"/>
+                <a16:creationId xmlns:a16="http://schemas.microsoft.com/office/drawing/2014/main" id="{314ED13C-E65B-3F1E-0ED0-3B12D5F75C55}"/>
               </a:ext>
             </a:extLst>
           </p:cNvPr>
@@ -2329,7 +2329,7 @@
           <p:cNvPr id="4" name="スライド番号プレースホルダー 3">
             <a:extLst>
               <a:ext uri="{FF2B5EF4-FFF2-40B4-BE49-F238E27FC236}">
-                <a16:creationId xmlns:a16="http://schemas.microsoft.com/office/drawing/2014/main" id="{4FD3DD98-4068-EA29-0A70-75FDD0E06B3D}"/>
+                <a16:creationId xmlns:a16="http://schemas.microsoft.com/office/drawing/2014/main" id="{ACAE1D87-D544-9D42-93CD-9733894C3233}"/>
               </a:ext>
             </a:extLst>
           </p:cNvPr>
@@ -2345,7 +2345,7 @@
           <a:bodyPr/>
           <a:lstStyle/>
           <a:p>
-            <a:fld id="{C2F1D243-1A93-4A8E-B147-14285FFC3BFF}" type="slidenum">
+            <a:fld id="{167C410E-EBC6-4D2C-8A67-7D710420BA75}" type="slidenum">
               <a:rPr kumimoji="1" lang="ja-JP" altLang="en-US" smtClean="0"/>
               <a:t>‹#›</a:t>
             </a:fld>
@@ -2356,7 +2356,7 @@
     </p:spTree>
     <p:extLst>
       <p:ext uri="{BB962C8B-B14F-4D97-AF65-F5344CB8AC3E}">
-        <p14:creationId xmlns:p14="http://schemas.microsoft.com/office/powerpoint/2010/main" val="827395309"/>
+        <p14:creationId xmlns:p14="http://schemas.microsoft.com/office/powerpoint/2010/main" val="3115836258"/>
       </p:ext>
     </p:extLst>
   </p:cSld>
@@ -2388,7 +2388,7 @@
           <p:cNvPr id="2" name="タイトル 1">
             <a:extLst>
               <a:ext uri="{FF2B5EF4-FFF2-40B4-BE49-F238E27FC236}">
-                <a16:creationId xmlns:a16="http://schemas.microsoft.com/office/drawing/2014/main" id="{F1C45BE7-9047-0BAC-5CE3-F463CCDA16A3}"/>
+                <a16:creationId xmlns:a16="http://schemas.microsoft.com/office/drawing/2014/main" id="{4687E8D0-EE27-E115-E38D-85D6A9062151}"/>
               </a:ext>
             </a:extLst>
           </p:cNvPr>
@@ -2425,7 +2425,7 @@
           <p:cNvPr id="3" name="コンテンツ プレースホルダー 2">
             <a:extLst>
               <a:ext uri="{FF2B5EF4-FFF2-40B4-BE49-F238E27FC236}">
-                <a16:creationId xmlns:a16="http://schemas.microsoft.com/office/drawing/2014/main" id="{E5D43372-B534-626C-0593-AC79067E0A1E}"/>
+                <a16:creationId xmlns:a16="http://schemas.microsoft.com/office/drawing/2014/main" id="{78815192-095F-244A-DB9E-D88F9088AB01}"/>
               </a:ext>
             </a:extLst>
           </p:cNvPr>
@@ -2547,7 +2547,7 @@
           <p:cNvPr id="4" name="テキスト プレースホルダー 3">
             <a:extLst>
               <a:ext uri="{FF2B5EF4-FFF2-40B4-BE49-F238E27FC236}">
-                <a16:creationId xmlns:a16="http://schemas.microsoft.com/office/drawing/2014/main" id="{CB40A9C9-6C13-41E3-7F45-595635339746}"/>
+                <a16:creationId xmlns:a16="http://schemas.microsoft.com/office/drawing/2014/main" id="{09E65514-4378-5D14-E154-F1A41347C69F}"/>
               </a:ext>
             </a:extLst>
           </p:cNvPr>
@@ -2618,7 +2618,7 @@
           <p:cNvPr id="5" name="日付プレースホルダー 4">
             <a:extLst>
               <a:ext uri="{FF2B5EF4-FFF2-40B4-BE49-F238E27FC236}">
-                <a16:creationId xmlns:a16="http://schemas.microsoft.com/office/drawing/2014/main" id="{682E74CA-0043-B65A-059E-FC0ACD53D6A2}"/>
+                <a16:creationId xmlns:a16="http://schemas.microsoft.com/office/drawing/2014/main" id="{BA48C902-E9A0-2BFA-6D4B-7571C744EB4C}"/>
               </a:ext>
             </a:extLst>
           </p:cNvPr>
@@ -2634,7 +2634,7 @@
           <a:bodyPr/>
           <a:lstStyle/>
           <a:p>
-            <a:fld id="{D03F5CBC-68FC-41D2-8B0A-10598E32BEEB}" type="datetimeFigureOut">
+            <a:fld id="{59837547-4ED5-4DCB-88FB-D53B87E71581}" type="datetimeFigureOut">
               <a:rPr kumimoji="1" lang="ja-JP" altLang="en-US" smtClean="0"/>
               <a:t>2026/7/30</a:t>
             </a:fld>
@@ -2647,7 +2647,7 @@
           <p:cNvPr id="6" name="フッター プレースホルダー 5">
             <a:extLst>
               <a:ext uri="{FF2B5EF4-FFF2-40B4-BE49-F238E27FC236}">
-                <a16:creationId xmlns:a16="http://schemas.microsoft.com/office/drawing/2014/main" id="{4AA3797C-DCA4-5876-B172-6CB02EAA49C2}"/>
+                <a16:creationId xmlns:a16="http://schemas.microsoft.com/office/drawing/2014/main" id="{9D7AF561-8531-1C02-23F7-F4DC6B299C9B}"/>
               </a:ext>
             </a:extLst>
           </p:cNvPr>
@@ -2672,7 +2672,7 @@
           <p:cNvPr id="7" name="スライド番号プレースホルダー 6">
             <a:extLst>
               <a:ext uri="{FF2B5EF4-FFF2-40B4-BE49-F238E27FC236}">
-                <a16:creationId xmlns:a16="http://schemas.microsoft.com/office/drawing/2014/main" id="{55DDEA6F-7376-9663-6B86-F56BFB69193B}"/>
+                <a16:creationId xmlns:a16="http://schemas.microsoft.com/office/drawing/2014/main" id="{0A462278-E36F-1690-1572-80380B3C87A3}"/>
               </a:ext>
             </a:extLst>
           </p:cNvPr>
@@ -2688,7 +2688,7 @@
           <a:bodyPr/>
           <a:lstStyle/>
           <a:p>
-            <a:fld id="{C2F1D243-1A93-4A8E-B147-14285FFC3BFF}" type="slidenum">
+            <a:fld id="{167C410E-EBC6-4D2C-8A67-7D710420BA75}" type="slidenum">
               <a:rPr kumimoji="1" lang="ja-JP" altLang="en-US" smtClean="0"/>
               <a:t>‹#›</a:t>
             </a:fld>
@@ -2699,7 +2699,7 @@
     </p:spTree>
     <p:extLst>
       <p:ext uri="{BB962C8B-B14F-4D97-AF65-F5344CB8AC3E}">
-        <p14:creationId xmlns:p14="http://schemas.microsoft.com/office/powerpoint/2010/main" val="141773362"/>
+        <p14:creationId xmlns:p14="http://schemas.microsoft.com/office/powerpoint/2010/main" val="1208348612"/>
       </p:ext>
     </p:extLst>
   </p:cSld>
@@ -2731,7 +2731,7 @@
           <p:cNvPr id="2" name="タイトル 1">
             <a:extLst>
               <a:ext uri="{FF2B5EF4-FFF2-40B4-BE49-F238E27FC236}">
-                <a16:creationId xmlns:a16="http://schemas.microsoft.com/office/drawing/2014/main" id="{9271E021-CD91-B9BA-24C0-065811ECC64C}"/>
+                <a16:creationId xmlns:a16="http://schemas.microsoft.com/office/drawing/2014/main" id="{56B4438E-D199-8504-009E-126B6477AA1B}"/>
               </a:ext>
             </a:extLst>
           </p:cNvPr>
@@ -2768,7 +2768,7 @@
           <p:cNvPr id="3" name="図プレースホルダー 2">
             <a:extLst>
               <a:ext uri="{FF2B5EF4-FFF2-40B4-BE49-F238E27FC236}">
-                <a16:creationId xmlns:a16="http://schemas.microsoft.com/office/drawing/2014/main" id="{8646C8B9-C9D0-0FD7-6F5D-9EC2F5CE2E0C}"/>
+                <a16:creationId xmlns:a16="http://schemas.microsoft.com/office/drawing/2014/main" id="{F7D064A7-13F1-04CC-0D2D-B1D9AB1DEEA0}"/>
               </a:ext>
             </a:extLst>
           </p:cNvPr>
@@ -2835,7 +2835,7 @@
           <p:cNvPr id="4" name="テキスト プレースホルダー 3">
             <a:extLst>
               <a:ext uri="{FF2B5EF4-FFF2-40B4-BE49-F238E27FC236}">
-                <a16:creationId xmlns:a16="http://schemas.microsoft.com/office/drawing/2014/main" id="{91DC0759-D422-CAA1-5AF2-8595DCB09389}"/>
+                <a16:creationId xmlns:a16="http://schemas.microsoft.com/office/drawing/2014/main" id="{DD1883C2-D423-3465-C61A-561F1C3E67DB}"/>
               </a:ext>
             </a:extLst>
           </p:cNvPr>
@@ -2906,7 +2906,7 @@
           <p:cNvPr id="5" name="日付プレースホルダー 4">
             <a:extLst>
               <a:ext uri="{FF2B5EF4-FFF2-40B4-BE49-F238E27FC236}">
-                <a16:creationId xmlns:a16="http://schemas.microsoft.com/office/drawing/2014/main" id="{3D675AF6-8890-2F40-20B2-BE1D93D91EAF}"/>
+                <a16:creationId xmlns:a16="http://schemas.microsoft.com/office/drawing/2014/main" id="{5C2C63D1-E528-8072-1C7A-52888BCCA5D3}"/>
               </a:ext>
             </a:extLst>
           </p:cNvPr>
@@ -2922,7 +2922,7 @@
           <a:bodyPr/>
           <a:lstStyle/>
           <a:p>
-            <a:fld id="{D03F5CBC-68FC-41D2-8B0A-10598E32BEEB}" type="datetimeFigureOut">
+            <a:fld id="{59837547-4ED5-4DCB-88FB-D53B87E71581}" type="datetimeFigureOut">
               <a:rPr kumimoji="1" lang="ja-JP" altLang="en-US" smtClean="0"/>
               <a:t>2026/7/30</a:t>
             </a:fld>
@@ -2935,7 +2935,7 @@
           <p:cNvPr id="6" name="フッター プレースホルダー 5">
             <a:extLst>
               <a:ext uri="{FF2B5EF4-FFF2-40B4-BE49-F238E27FC236}">
-                <a16:creationId xmlns:a16="http://schemas.microsoft.com/office/drawing/2014/main" id="{474A9C17-5E8C-497B-7C98-10868E1DBC8D}"/>
+                <a16:creationId xmlns:a16="http://schemas.microsoft.com/office/drawing/2014/main" id="{6DD7ABA1-B7D4-4966-A960-11839E2A1FA7}"/>
               </a:ext>
             </a:extLst>
           </p:cNvPr>
@@ -2960,7 +2960,7 @@
           <p:cNvPr id="7" name="スライド番号プレースホルダー 6">
             <a:extLst>
               <a:ext uri="{FF2B5EF4-FFF2-40B4-BE49-F238E27FC236}">
-                <a16:creationId xmlns:a16="http://schemas.microsoft.com/office/drawing/2014/main" id="{DCCF0B16-5C97-BF46-89C8-6C548DC4B2B6}"/>
+                <a16:creationId xmlns:a16="http://schemas.microsoft.com/office/drawing/2014/main" id="{A9492FD2-74B0-B606-BDEE-AAAB9F0FFCF8}"/>
               </a:ext>
             </a:extLst>
           </p:cNvPr>
@@ -2976,7 +2976,7 @@
           <a:bodyPr/>
           <a:lstStyle/>
           <a:p>
-            <a:fld id="{C2F1D243-1A93-4A8E-B147-14285FFC3BFF}" type="slidenum">
+            <a:fld id="{167C410E-EBC6-4D2C-8A67-7D710420BA75}" type="slidenum">
               <a:rPr kumimoji="1" lang="ja-JP" altLang="en-US" smtClean="0"/>
               <a:t>‹#›</a:t>
             </a:fld>
@@ -2987,7 +2987,7 @@
     </p:spTree>
     <p:extLst>
       <p:ext uri="{BB962C8B-B14F-4D97-AF65-F5344CB8AC3E}">
-        <p14:creationId xmlns:p14="http://schemas.microsoft.com/office/powerpoint/2010/main" val="3748745785"/>
+        <p14:creationId xmlns:p14="http://schemas.microsoft.com/office/powerpoint/2010/main" val="1979342490"/>
       </p:ext>
     </p:extLst>
   </p:cSld>
@@ -3024,7 +3024,7 @@
           <p:cNvPr id="2" name="タイトル プレースホルダー 1">
             <a:extLst>
               <a:ext uri="{FF2B5EF4-FFF2-40B4-BE49-F238E27FC236}">
-                <a16:creationId xmlns:a16="http://schemas.microsoft.com/office/drawing/2014/main" id="{16894567-E848-D514-CBE6-92D958EF5D5B}"/>
+                <a16:creationId xmlns:a16="http://schemas.microsoft.com/office/drawing/2014/main" id="{937FC1BC-E3D4-D77F-D827-D769620EB71D}"/>
               </a:ext>
             </a:extLst>
           </p:cNvPr>
@@ -3062,7 +3062,7 @@
           <p:cNvPr id="3" name="テキスト プレースホルダー 2">
             <a:extLst>
               <a:ext uri="{FF2B5EF4-FFF2-40B4-BE49-F238E27FC236}">
-                <a16:creationId xmlns:a16="http://schemas.microsoft.com/office/drawing/2014/main" id="{C7D24A5F-1EC7-E5E5-E1B4-07B86CFA96EB}"/>
+                <a16:creationId xmlns:a16="http://schemas.microsoft.com/office/drawing/2014/main" id="{D9C7848D-38F2-6668-3506-D269270B3157}"/>
               </a:ext>
             </a:extLst>
           </p:cNvPr>
@@ -3161,7 +3161,7 @@
           <p:cNvPr id="4" name="日付プレースホルダー 3">
             <a:extLst>
               <a:ext uri="{FF2B5EF4-FFF2-40B4-BE49-F238E27FC236}">
-                <a16:creationId xmlns:a16="http://schemas.microsoft.com/office/drawing/2014/main" id="{19D3D1D3-DD50-E96D-0C2A-01E869944966}"/>
+                <a16:creationId xmlns:a16="http://schemas.microsoft.com/office/drawing/2014/main" id="{19104820-9CCB-19BE-B2F8-F3EEF0C889E7}"/>
               </a:ext>
             </a:extLst>
           </p:cNvPr>
@@ -3195,7 +3195,7 @@
             </a:lvl1pPr>
           </a:lstStyle>
           <a:p>
-            <a:fld id="{D03F5CBC-68FC-41D2-8B0A-10598E32BEEB}" type="datetimeFigureOut">
+            <a:fld id="{59837547-4ED5-4DCB-88FB-D53B87E71581}" type="datetimeFigureOut">
               <a:rPr kumimoji="1" lang="ja-JP" altLang="en-US" smtClean="0"/>
               <a:t>2026/7/30</a:t>
             </a:fld>
@@ -3208,7 +3208,7 @@
           <p:cNvPr id="5" name="フッター プレースホルダー 4">
             <a:extLst>
               <a:ext uri="{FF2B5EF4-FFF2-40B4-BE49-F238E27FC236}">
-                <a16:creationId xmlns:a16="http://schemas.microsoft.com/office/drawing/2014/main" id="{517F68D7-13BC-7DFD-D6BD-F2C56E6CC06A}"/>
+                <a16:creationId xmlns:a16="http://schemas.microsoft.com/office/drawing/2014/main" id="{E5DF34BC-AE21-5840-5F6E-358799DC0C4C}"/>
               </a:ext>
             </a:extLst>
           </p:cNvPr>
@@ -3251,7 +3251,7 @@
           <p:cNvPr id="6" name="スライド番号プレースホルダー 5">
             <a:extLst>
               <a:ext uri="{FF2B5EF4-FFF2-40B4-BE49-F238E27FC236}">
-                <a16:creationId xmlns:a16="http://schemas.microsoft.com/office/drawing/2014/main" id="{BE804FE5-CC6D-5F5E-0861-96165FAC6C0C}"/>
+                <a16:creationId xmlns:a16="http://schemas.microsoft.com/office/drawing/2014/main" id="{0AA3C71D-B382-8A12-B14E-C5E6411D1DB3}"/>
               </a:ext>
             </a:extLst>
           </p:cNvPr>
@@ -3285,7 +3285,7 @@
             </a:lvl1pPr>
           </a:lstStyle>
           <a:p>
-            <a:fld id="{C2F1D243-1A93-4A8E-B147-14285FFC3BFF}" type="slidenum">
+            <a:fld id="{167C410E-EBC6-4D2C-8A67-7D710420BA75}" type="slidenum">
               <a:rPr kumimoji="1" lang="ja-JP" altLang="en-US" smtClean="0"/>
               <a:t>‹#›</a:t>
             </a:fld>
@@ -3296,7 +3296,7 @@
     </p:spTree>
     <p:extLst>
       <p:ext uri="{BB962C8B-B14F-4D97-AF65-F5344CB8AC3E}">
-        <p14:creationId xmlns:p14="http://schemas.microsoft.com/office/powerpoint/2010/main" val="2928003308"/>
+        <p14:creationId xmlns:p14="http://schemas.microsoft.com/office/powerpoint/2010/main" val="843090176"/>
       </p:ext>
     </p:extLst>
   </p:cSld>
@@ -3619,7 +3619,7 @@
           <p:cNvPr id="2" name="テキスト ボックス 1">
             <a:extLst>
               <a:ext uri="{FF2B5EF4-FFF2-40B4-BE49-F238E27FC236}">
-                <a16:creationId xmlns:a16="http://schemas.microsoft.com/office/drawing/2014/main" id="{9F679579-5E76-2680-3FD8-7607004C97FA}"/>
+                <a16:creationId xmlns:a16="http://schemas.microsoft.com/office/drawing/2014/main" id="{E5C48289-6047-ED9E-A25C-9E7445BB8EB7}"/>
               </a:ext>
             </a:extLst>
           </p:cNvPr>
@@ -3665,7 +3665,7 @@
           <p:cNvPr id="3" name="テキスト ボックス 2">
             <a:extLst>
               <a:ext uri="{FF2B5EF4-FFF2-40B4-BE49-F238E27FC236}">
-                <a16:creationId xmlns:a16="http://schemas.microsoft.com/office/drawing/2014/main" id="{DA1E29F9-FB51-0586-014F-99D6D3ECBEF8}"/>
+                <a16:creationId xmlns:a16="http://schemas.microsoft.com/office/drawing/2014/main" id="{94F27C56-5FE6-7B60-63F4-F102E93EDF68}"/>
               </a:ext>
             </a:extLst>
           </p:cNvPr>
@@ -3714,7 +3714,7 @@
           <p:cNvPr id="4" name="テキスト ボックス 3">
             <a:extLst>
               <a:ext uri="{FF2B5EF4-FFF2-40B4-BE49-F238E27FC236}">
-                <a16:creationId xmlns:a16="http://schemas.microsoft.com/office/drawing/2014/main" id="{AFBE0EDB-DBD0-A9BF-B900-6D8EB7DCEEE7}"/>
+                <a16:creationId xmlns:a16="http://schemas.microsoft.com/office/drawing/2014/main" id="{6160DFA4-8FFC-0F81-9790-D26A948907CF}"/>
               </a:ext>
             </a:extLst>
           </p:cNvPr>
@@ -3754,7 +3754,7 @@
           <p:cNvPr id="5" name="テキスト ボックス 4">
             <a:extLst>
               <a:ext uri="{FF2B5EF4-FFF2-40B4-BE49-F238E27FC236}">
-                <a16:creationId xmlns:a16="http://schemas.microsoft.com/office/drawing/2014/main" id="{B97E555B-3FC7-3910-316B-A572EA7505D8}"/>
+                <a16:creationId xmlns:a16="http://schemas.microsoft.com/office/drawing/2014/main" id="{6E8A0906-4DFB-FDC2-3A45-912AF2A15126}"/>
               </a:ext>
             </a:extLst>
           </p:cNvPr>
@@ -3801,7 +3801,7 @@
             <a:hlinkClick r:id="" action="ppaction://media"/>
             <a:extLst>
               <a:ext uri="{FF2B5EF4-FFF2-40B4-BE49-F238E27FC236}">
-                <a16:creationId xmlns:a16="http://schemas.microsoft.com/office/drawing/2014/main" id="{29E8D2CA-7B8D-C3D6-C643-6AF417A73082}"/>
+                <a16:creationId xmlns:a16="http://schemas.microsoft.com/office/drawing/2014/main" id="{D395F09D-A9B0-AE95-005B-861ACCD8D449}"/>
               </a:ext>
             </a:extLst>
           </p:cNvPr>
@@ -3836,7 +3836,7 @@
     </p:spTree>
     <p:extLst>
       <p:ext uri="{BB962C8B-B14F-4D97-AF65-F5344CB8AC3E}">
-        <p14:creationId xmlns:p14="http://schemas.microsoft.com/office/powerpoint/2010/main" val="917419520"/>
+        <p14:creationId xmlns:p14="http://schemas.microsoft.com/office/powerpoint/2010/main" val="3957826176"/>
       </p:ext>
     </p:extLst>
   </p:cSld>
@@ -3960,7 +3960,7 @@
           <p:cNvPr id="2" name="テキスト ボックス 1">
             <a:extLst>
               <a:ext uri="{FF2B5EF4-FFF2-40B4-BE49-F238E27FC236}">
-                <a16:creationId xmlns:a16="http://schemas.microsoft.com/office/drawing/2014/main" id="{AA320A0B-B262-2247-5A8E-8C3453903CB0}"/>
+                <a16:creationId xmlns:a16="http://schemas.microsoft.com/office/drawing/2014/main" id="{28486CE3-9B9A-1DAA-5E66-CCE19063103B}"/>
               </a:ext>
             </a:extLst>
           </p:cNvPr>
@@ -4006,7 +4006,7 @@
           <p:cNvPr id="3" name="テキスト ボックス 2">
             <a:extLst>
               <a:ext uri="{FF2B5EF4-FFF2-40B4-BE49-F238E27FC236}">
-                <a16:creationId xmlns:a16="http://schemas.microsoft.com/office/drawing/2014/main" id="{4BD51AA8-6714-1861-F93E-A02366EC6DEE}"/>
+                <a16:creationId xmlns:a16="http://schemas.microsoft.com/office/drawing/2014/main" id="{4CFE941F-AC91-7888-9C7A-C5591514FA5A}"/>
               </a:ext>
             </a:extLst>
           </p:cNvPr>
@@ -4046,7 +4046,7 @@
           <p:cNvPr id="4" name="テキスト ボックス 3">
             <a:extLst>
               <a:ext uri="{FF2B5EF4-FFF2-40B4-BE49-F238E27FC236}">
-                <a16:creationId xmlns:a16="http://schemas.microsoft.com/office/drawing/2014/main" id="{CED2D45E-46C5-5F40-7FF9-D5F496814B14}"/>
+                <a16:creationId xmlns:a16="http://schemas.microsoft.com/office/drawing/2014/main" id="{51A04CD0-A80C-5294-C8F1-75F9FE9413B5}"/>
               </a:ext>
             </a:extLst>
           </p:cNvPr>
@@ -4056,7 +4056,7 @@
         <p:spPr>
           <a:xfrm>
             <a:off x="533400" y="3429000"/>
-            <a:ext cx="10795000" cy="707886"/>
+            <a:ext cx="10795000" cy="400110"/>
           </a:xfrm>
           <a:prstGeom prst="rect">
             <a:avLst/>
@@ -4076,14 +4076,17 @@
                 </a:solidFill>
                 <a:latin typeface="Arial" panose="020B0604020202020204" pitchFamily="34" charset="0"/>
               </a:rPr>
-              <a:t>GoalPilot GoalPilot is an anti give up goal achievement app for people who often quit after a few days</a:t>
-            </a:r>
-            <a:endParaRPr kumimoji="1" lang="ja-JP" altLang="en-US" sz="2000">
-              <a:solidFill>
-                <a:srgbClr val="333333"/>
-              </a:solidFill>
-              <a:latin typeface="Arial" panose="020B0604020202020204" pitchFamily="34" charset="0"/>
-            </a:endParaRPr>
+              <a:t>Goal Pilot App</a:t>
+            </a:r>
+            <a:r>
+              <a:rPr kumimoji="1" lang="ja-JP" altLang="en-US" sz="2000">
+                <a:solidFill>
+                  <a:srgbClr val="333333"/>
+                </a:solidFill>
+                <a:latin typeface="Arial" panose="020B0604020202020204" pitchFamily="34" charset="0"/>
+              </a:rPr>
+              <a:t>の目的、構成、実装を公開コードから確認できるプロジェクトです。</a:t>
+            </a:r>
           </a:p>
         </p:txBody>
       </p:sp>
@@ -4092,7 +4095,7 @@
           <p:cNvPr id="5" name="テキスト ボックス 4">
             <a:extLst>
               <a:ext uri="{FF2B5EF4-FFF2-40B4-BE49-F238E27FC236}">
-                <a16:creationId xmlns:a16="http://schemas.microsoft.com/office/drawing/2014/main" id="{F1809B97-4737-420B-683C-066B2893B276}"/>
+                <a16:creationId xmlns:a16="http://schemas.microsoft.com/office/drawing/2014/main" id="{8664BD88-0C32-9E9E-0FB1-4691A79D2B82}"/>
               </a:ext>
             </a:extLst>
           </p:cNvPr>
@@ -4139,7 +4142,7 @@
             <a:hlinkClick r:id="" action="ppaction://media"/>
             <a:extLst>
               <a:ext uri="{FF2B5EF4-FFF2-40B4-BE49-F238E27FC236}">
-                <a16:creationId xmlns:a16="http://schemas.microsoft.com/office/drawing/2014/main" id="{50094F5B-EEFF-E4D9-7F24-FEA7603B9E85}"/>
+                <a16:creationId xmlns:a16="http://schemas.microsoft.com/office/drawing/2014/main" id="{D144CF5D-DA7A-E754-A27C-D4281A6A2A64}"/>
               </a:ext>
             </a:extLst>
           </p:cNvPr>
@@ -4174,7 +4177,7 @@
     </p:spTree>
     <p:extLst>
       <p:ext uri="{BB962C8B-B14F-4D97-AF65-F5344CB8AC3E}">
-        <p14:creationId xmlns:p14="http://schemas.microsoft.com/office/powerpoint/2010/main" val="3645476774"/>
+        <p14:creationId xmlns:p14="http://schemas.microsoft.com/office/powerpoint/2010/main" val="26787323"/>
       </p:ext>
     </p:extLst>
   </p:cSld>
@@ -4183,10 +4186,10 @@
   </p:clrMapOvr>
   <mc:AlternateContent xmlns:mc="http://schemas.openxmlformats.org/markup-compatibility/2006">
     <mc:Choice xmlns:p14="http://schemas.microsoft.com/office/powerpoint/2010/main" Requires="p14">
-      <p:transition spd="slow" p14:dur="2000" advTm="9000"/>
+      <p:transition spd="slow" p14:dur="2000" advTm="8000"/>
     </mc:Choice>
     <mc:Fallback>
-      <p:transition spd="slow" advTm="9000"/>
+      <p:transition spd="slow" advTm="8000"/>
     </mc:Fallback>
   </mc:AlternateContent>
   <p:timing>
@@ -4217,7 +4220,7 @@
                                   <p:childTnLst>
                                     <p:cmd type="call" cmd="playFrom(0.0)">
                                       <p:cBhvr>
-                                        <p:cTn id="6" dur="8945" fill="hold"/>
+                                        <p:cTn id="6" dur="7481" fill="hold"/>
                                         <p:tgtEl>
                                           <p:spTgt spid="6"/>
                                         </p:tgtEl>
@@ -4298,7 +4301,7 @@
           <p:cNvPr id="2" name="テキスト ボックス 1">
             <a:extLst>
               <a:ext uri="{FF2B5EF4-FFF2-40B4-BE49-F238E27FC236}">
-                <a16:creationId xmlns:a16="http://schemas.microsoft.com/office/drawing/2014/main" id="{E89A966D-F231-487B-0803-CF8826295503}"/>
+                <a16:creationId xmlns:a16="http://schemas.microsoft.com/office/drawing/2014/main" id="{7012BBDB-8371-5BD8-40A7-E88BC293B1A2}"/>
               </a:ext>
             </a:extLst>
           </p:cNvPr>
@@ -4344,7 +4347,7 @@
           <p:cNvPr id="3" name="テキスト ボックス 2">
             <a:extLst>
               <a:ext uri="{FF2B5EF4-FFF2-40B4-BE49-F238E27FC236}">
-                <a16:creationId xmlns:a16="http://schemas.microsoft.com/office/drawing/2014/main" id="{E5F8B56A-C15C-5FF0-1046-3BAADE5517B5}"/>
+                <a16:creationId xmlns:a16="http://schemas.microsoft.com/office/drawing/2014/main" id="{216F1952-ED2D-D26E-0B92-E42FD62F9781}"/>
               </a:ext>
             </a:extLst>
           </p:cNvPr>
@@ -4384,7 +4387,7 @@
           <p:cNvPr id="4" name="テキスト ボックス 3">
             <a:extLst>
               <a:ext uri="{FF2B5EF4-FFF2-40B4-BE49-F238E27FC236}">
-                <a16:creationId xmlns:a16="http://schemas.microsoft.com/office/drawing/2014/main" id="{7E9AF7C8-0A23-6C10-028A-FFDD29A8EA53}"/>
+                <a16:creationId xmlns:a16="http://schemas.microsoft.com/office/drawing/2014/main" id="{A8586E64-8DA8-F487-4826-65A2EB364FB6}"/>
               </a:ext>
             </a:extLst>
           </p:cNvPr>
@@ -4479,7 +4482,7 @@
           <p:cNvPr id="5" name="テキスト ボックス 4">
             <a:extLst>
               <a:ext uri="{FF2B5EF4-FFF2-40B4-BE49-F238E27FC236}">
-                <a16:creationId xmlns:a16="http://schemas.microsoft.com/office/drawing/2014/main" id="{250B87FF-11F6-70DD-C8CE-DEF1F46C0383}"/>
+                <a16:creationId xmlns:a16="http://schemas.microsoft.com/office/drawing/2014/main" id="{95B4BE6A-A71D-6BE6-DA9B-EA8AE6B436EE}"/>
               </a:ext>
             </a:extLst>
           </p:cNvPr>
@@ -4526,7 +4529,7 @@
             <a:hlinkClick r:id="" action="ppaction://media"/>
             <a:extLst>
               <a:ext uri="{FF2B5EF4-FFF2-40B4-BE49-F238E27FC236}">
-                <a16:creationId xmlns:a16="http://schemas.microsoft.com/office/drawing/2014/main" id="{9DED06EB-E392-85F9-124C-A7C205B8AA0A}"/>
+                <a16:creationId xmlns:a16="http://schemas.microsoft.com/office/drawing/2014/main" id="{61D4404F-C5B7-7280-6CA6-D4AC4032BAE3}"/>
               </a:ext>
             </a:extLst>
           </p:cNvPr>
@@ -4561,7 +4564,7 @@
     </p:spTree>
     <p:extLst>
       <p:ext uri="{BB962C8B-B14F-4D97-AF65-F5344CB8AC3E}">
-        <p14:creationId xmlns:p14="http://schemas.microsoft.com/office/powerpoint/2010/main" val="3960260016"/>
+        <p14:creationId xmlns:p14="http://schemas.microsoft.com/office/powerpoint/2010/main" val="2530150783"/>
       </p:ext>
     </p:extLst>
   </p:cSld>
@@ -4685,7 +4688,7 @@
           <p:cNvPr id="2" name="テキスト ボックス 1">
             <a:extLst>
               <a:ext uri="{FF2B5EF4-FFF2-40B4-BE49-F238E27FC236}">
-                <a16:creationId xmlns:a16="http://schemas.microsoft.com/office/drawing/2014/main" id="{25227128-2B47-CD85-EAC2-30E3FCBE6932}"/>
+                <a16:creationId xmlns:a16="http://schemas.microsoft.com/office/drawing/2014/main" id="{A465CF51-CDDB-EA5A-18C1-9DFF87682F54}"/>
               </a:ext>
             </a:extLst>
           </p:cNvPr>
@@ -4731,7 +4734,7 @@
           <p:cNvPr id="3" name="テキスト ボックス 2">
             <a:extLst>
               <a:ext uri="{FF2B5EF4-FFF2-40B4-BE49-F238E27FC236}">
-                <a16:creationId xmlns:a16="http://schemas.microsoft.com/office/drawing/2014/main" id="{CC0F88DA-1B83-C1CD-F55A-958F37393EE2}"/>
+                <a16:creationId xmlns:a16="http://schemas.microsoft.com/office/drawing/2014/main" id="{ECBFDAEB-19D7-178F-0A09-CE175E601024}"/>
               </a:ext>
             </a:extLst>
           </p:cNvPr>
@@ -4771,7 +4774,7 @@
           <p:cNvPr id="4" name="テキスト ボックス 3">
             <a:extLst>
               <a:ext uri="{FF2B5EF4-FFF2-40B4-BE49-F238E27FC236}">
-                <a16:creationId xmlns:a16="http://schemas.microsoft.com/office/drawing/2014/main" id="{17731C9A-33F9-9548-9A2A-A14C16595907}"/>
+                <a16:creationId xmlns:a16="http://schemas.microsoft.com/office/drawing/2014/main" id="{5A65E89B-BB1C-12BC-B842-067EE432B3F1}"/>
               </a:ext>
             </a:extLst>
           </p:cNvPr>
@@ -4881,7 +4884,7 @@
           <p:cNvPr id="5" name="テキスト ボックス 4">
             <a:extLst>
               <a:ext uri="{FF2B5EF4-FFF2-40B4-BE49-F238E27FC236}">
-                <a16:creationId xmlns:a16="http://schemas.microsoft.com/office/drawing/2014/main" id="{405238F8-188F-A7FD-E5B9-4462152D19F2}"/>
+                <a16:creationId xmlns:a16="http://schemas.microsoft.com/office/drawing/2014/main" id="{61635FBB-7A9D-D01D-D5EC-B5579B7DE31D}"/>
               </a:ext>
             </a:extLst>
           </p:cNvPr>
@@ -4928,7 +4931,7 @@
             <a:hlinkClick r:id="" action="ppaction://media"/>
             <a:extLst>
               <a:ext uri="{FF2B5EF4-FFF2-40B4-BE49-F238E27FC236}">
-                <a16:creationId xmlns:a16="http://schemas.microsoft.com/office/drawing/2014/main" id="{8F3CD4C5-A324-5033-8FFC-B34B5A1A7013}"/>
+                <a16:creationId xmlns:a16="http://schemas.microsoft.com/office/drawing/2014/main" id="{D5142E9A-0FA3-78C4-5348-0699BC9B9526}"/>
               </a:ext>
             </a:extLst>
           </p:cNvPr>
@@ -4963,7 +4966,7 @@
     </p:spTree>
     <p:extLst>
       <p:ext uri="{BB962C8B-B14F-4D97-AF65-F5344CB8AC3E}">
-        <p14:creationId xmlns:p14="http://schemas.microsoft.com/office/powerpoint/2010/main" val="2087462055"/>
+        <p14:creationId xmlns:p14="http://schemas.microsoft.com/office/powerpoint/2010/main" val="2957715505"/>
       </p:ext>
     </p:extLst>
   </p:cSld>
@@ -5087,7 +5090,7 @@
           <p:cNvPr id="2" name="テキスト ボックス 1">
             <a:extLst>
               <a:ext uri="{FF2B5EF4-FFF2-40B4-BE49-F238E27FC236}">
-                <a16:creationId xmlns:a16="http://schemas.microsoft.com/office/drawing/2014/main" id="{E1698652-2E17-6D8D-8F3E-8603CA7FA2CA}"/>
+                <a16:creationId xmlns:a16="http://schemas.microsoft.com/office/drawing/2014/main" id="{ED4C11FB-6C5A-A6E7-E13E-C28955CD4791}"/>
               </a:ext>
             </a:extLst>
           </p:cNvPr>
@@ -5133,7 +5136,7 @@
           <p:cNvPr id="3" name="テキスト ボックス 2">
             <a:extLst>
               <a:ext uri="{FF2B5EF4-FFF2-40B4-BE49-F238E27FC236}">
-                <a16:creationId xmlns:a16="http://schemas.microsoft.com/office/drawing/2014/main" id="{A8075426-2223-ECA3-9A7C-FBD24E68BBD9}"/>
+                <a16:creationId xmlns:a16="http://schemas.microsoft.com/office/drawing/2014/main" id="{CA81A3C1-F984-AA18-DA98-2CA37F9B8AF1}"/>
               </a:ext>
             </a:extLst>
           </p:cNvPr>
@@ -5173,7 +5176,7 @@
           <p:cNvPr id="4" name="テキスト ボックス 3">
             <a:extLst>
               <a:ext uri="{FF2B5EF4-FFF2-40B4-BE49-F238E27FC236}">
-                <a16:creationId xmlns:a16="http://schemas.microsoft.com/office/drawing/2014/main" id="{05658EB6-2CE5-E302-810B-82C094B0909E}"/>
+                <a16:creationId xmlns:a16="http://schemas.microsoft.com/office/drawing/2014/main" id="{455C7BB4-0000-A8B0-80A5-02AB2FDD3825}"/>
               </a:ext>
             </a:extLst>
           </p:cNvPr>
@@ -5197,20 +5200,14 @@
           <a:lstStyle/>
           <a:p>
             <a:r>
-              <a:rPr kumimoji="1" lang="en-US" altLang="ja-JP" sz="2000">
+              <a:rPr kumimoji="1" lang="ja-JP" altLang="en-US" sz="2000">
                 <a:solidFill>
                   <a:srgbClr val="333333"/>
                 </a:solidFill>
                 <a:latin typeface="Arial" panose="020B0604020202020204" pitchFamily="34" charset="0"/>
               </a:rPr>
-              <a:t>Add sitemap.xml and robots.txt for SEO crawlability</a:t>
-            </a:r>
-            <a:endParaRPr kumimoji="1" lang="ja-JP" altLang="en-US" sz="2000">
-              <a:solidFill>
-                <a:srgbClr val="333333"/>
-              </a:solidFill>
-              <a:latin typeface="Arial" panose="020B0604020202020204" pitchFamily="34" charset="0"/>
-            </a:endParaRPr>
+              <a:t>直近のコミットでは、新機能の追加と実装強化が行われました。</a:t>
+            </a:r>
           </a:p>
         </p:txBody>
       </p:sp>
@@ -5219,7 +5216,7 @@
           <p:cNvPr id="5" name="テキスト ボックス 4">
             <a:extLst>
               <a:ext uri="{FF2B5EF4-FFF2-40B4-BE49-F238E27FC236}">
-                <a16:creationId xmlns:a16="http://schemas.microsoft.com/office/drawing/2014/main" id="{B0737022-95D5-D417-4EFC-85589F6F9EA3}"/>
+                <a16:creationId xmlns:a16="http://schemas.microsoft.com/office/drawing/2014/main" id="{5C10E268-250B-70ED-8E45-3782AC00C5B7}"/>
               </a:ext>
             </a:extLst>
           </p:cNvPr>
@@ -5266,7 +5263,7 @@
             <a:hlinkClick r:id="" action="ppaction://media"/>
             <a:extLst>
               <a:ext uri="{FF2B5EF4-FFF2-40B4-BE49-F238E27FC236}">
-                <a16:creationId xmlns:a16="http://schemas.microsoft.com/office/drawing/2014/main" id="{E8A8BFCA-C41D-E633-18AC-96A69A195118}"/>
+                <a16:creationId xmlns:a16="http://schemas.microsoft.com/office/drawing/2014/main" id="{04C65263-320C-19D4-C342-0CF4D97BBD2D}"/>
               </a:ext>
             </a:extLst>
           </p:cNvPr>
@@ -5301,7 +5298,7 @@
     </p:spTree>
     <p:extLst>
       <p:ext uri="{BB962C8B-B14F-4D97-AF65-F5344CB8AC3E}">
-        <p14:creationId xmlns:p14="http://schemas.microsoft.com/office/powerpoint/2010/main" val="2484196444"/>
+        <p14:creationId xmlns:p14="http://schemas.microsoft.com/office/powerpoint/2010/main" val="3258369593"/>
       </p:ext>
     </p:extLst>
   </p:cSld>
@@ -5310,10 +5307,10 @@
   </p:clrMapOvr>
   <mc:AlternateContent xmlns:mc="http://schemas.openxmlformats.org/markup-compatibility/2006">
     <mc:Choice xmlns:p14="http://schemas.microsoft.com/office/powerpoint/2010/main" Requires="p14">
-      <p:transition spd="slow" p14:dur="2000" advTm="11000"/>
+      <p:transition spd="slow" p14:dur="2000" advTm="6000"/>
     </mc:Choice>
     <mc:Fallback>
-      <p:transition spd="slow" advTm="11000"/>
+      <p:transition spd="slow" advTm="6000"/>
     </mc:Fallback>
   </mc:AlternateContent>
   <p:timing>
@@ -5344,7 +5341,7 @@
                                   <p:childTnLst>
                                     <p:cmd type="call" cmd="playFrom(0.0)">
                                       <p:cBhvr>
-                                        <p:cTn id="6" dur="10325" fill="hold"/>
+                                        <p:cTn id="6" dur="5687" fill="hold"/>
                                         <p:tgtEl>
                                           <p:spTgt spid="6"/>
                                         </p:tgtEl>
@@ -5425,7 +5422,7 @@
           <p:cNvPr id="2" name="テキスト ボックス 1">
             <a:extLst>
               <a:ext uri="{FF2B5EF4-FFF2-40B4-BE49-F238E27FC236}">
-                <a16:creationId xmlns:a16="http://schemas.microsoft.com/office/drawing/2014/main" id="{42B7EEF3-3238-037D-6FD4-F5EAAA78D39A}"/>
+                <a16:creationId xmlns:a16="http://schemas.microsoft.com/office/drawing/2014/main" id="{6736E2DB-05B9-A431-9711-C438DF3F2387}"/>
               </a:ext>
             </a:extLst>
           </p:cNvPr>
@@ -5471,7 +5468,7 @@
           <p:cNvPr id="3" name="テキスト ボックス 2">
             <a:extLst>
               <a:ext uri="{FF2B5EF4-FFF2-40B4-BE49-F238E27FC236}">
-                <a16:creationId xmlns:a16="http://schemas.microsoft.com/office/drawing/2014/main" id="{11EDEAAD-EE15-CCA3-11D1-DC767B876D11}"/>
+                <a16:creationId xmlns:a16="http://schemas.microsoft.com/office/drawing/2014/main" id="{4020D4DE-F057-E2AA-8D51-3C8E5F1991A6}"/>
               </a:ext>
             </a:extLst>
           </p:cNvPr>
@@ -5511,7 +5508,7 @@
           <p:cNvPr id="4" name="テキスト ボックス 3">
             <a:extLst>
               <a:ext uri="{FF2B5EF4-FFF2-40B4-BE49-F238E27FC236}">
-                <a16:creationId xmlns:a16="http://schemas.microsoft.com/office/drawing/2014/main" id="{61244080-3CBF-74C2-FC87-BCFE6887237F}"/>
+                <a16:creationId xmlns:a16="http://schemas.microsoft.com/office/drawing/2014/main" id="{F1C79F60-6B4D-FCAB-02D1-E8D46E802F8F}"/>
               </a:ext>
             </a:extLst>
           </p:cNvPr>
@@ -5576,7 +5573,7 @@
           <p:cNvPr id="5" name="テキスト ボックス 4">
             <a:extLst>
               <a:ext uri="{FF2B5EF4-FFF2-40B4-BE49-F238E27FC236}">
-                <a16:creationId xmlns:a16="http://schemas.microsoft.com/office/drawing/2014/main" id="{D2310959-AEB4-7742-ECF5-29A8F5102F7D}"/>
+                <a16:creationId xmlns:a16="http://schemas.microsoft.com/office/drawing/2014/main" id="{0E24F109-34B6-0457-1522-E14AD13E3ADD}"/>
               </a:ext>
             </a:extLst>
           </p:cNvPr>
@@ -5623,7 +5620,7 @@
             <a:hlinkClick r:id="" action="ppaction://media"/>
             <a:extLst>
               <a:ext uri="{FF2B5EF4-FFF2-40B4-BE49-F238E27FC236}">
-                <a16:creationId xmlns:a16="http://schemas.microsoft.com/office/drawing/2014/main" id="{F589DAA6-B861-F1D2-ABF6-774DDBA578E8}"/>
+                <a16:creationId xmlns:a16="http://schemas.microsoft.com/office/drawing/2014/main" id="{1E2ABC02-A36A-DEB7-8258-442D7FEFCE86}"/>
               </a:ext>
             </a:extLst>
           </p:cNvPr>
@@ -5658,7 +5655,7 @@
     </p:spTree>
     <p:extLst>
       <p:ext uri="{BB962C8B-B14F-4D97-AF65-F5344CB8AC3E}">
-        <p14:creationId xmlns:p14="http://schemas.microsoft.com/office/powerpoint/2010/main" val="1982556700"/>
+        <p14:creationId xmlns:p14="http://schemas.microsoft.com/office/powerpoint/2010/main" val="636558991"/>
       </p:ext>
     </p:extLst>
   </p:cSld>
